--- a/Document/Báo cáo đồ án 2026.pptx
+++ b/Document/Báo cáo đồ án 2026.pptx
@@ -32,18 +32,17 @@
     <p:embeddedFont>
       <p:font typeface="Open Sans" panose="020B0606030504020204" pitchFamily="34" charset="0"/>
       <p:regular r:id="rId20"/>
+      <p:bold r:id="rId21"/>
+      <p:italic r:id="rId22"/>
+      <p:boldItalic r:id="rId23"/>
     </p:embeddedFont>
     <p:embeddedFont>
       <p:font typeface="Open Sans Bold" panose="020B0806030504020204" charset="0"/>
-      <p:regular r:id="rId21"/>
+      <p:regular r:id="rId24"/>
     </p:embeddedFont>
     <p:embeddedFont>
       <p:font typeface="Open Sans Italics" panose="020B0604020202020204" charset="0"/>
-      <p:regular r:id="rId22"/>
-    </p:embeddedFont>
-    <p:embeddedFont>
-      <p:font typeface="Poppins Bold" panose="020B0604020202020204" charset="0"/>
-      <p:regular r:id="rId23"/>
+      <p:regular r:id="rId25"/>
     </p:embeddedFont>
   </p:embeddedFontLst>
   <p:defaultTextStyle>
@@ -594,6 +593,90 @@
 </file>
 
 <file path=ppt/notesSlides/notesSlide2.xml><?xml version="1.0" encoding="utf-8"?>
+<p:notes xmlns:a="http://schemas.openxmlformats.org/drawingml/2006/main" xmlns:r="http://schemas.openxmlformats.org/officeDocument/2006/relationships" xmlns:p="http://schemas.openxmlformats.org/presentationml/2006/main">
+  <p:cSld>
+    <p:spTree>
+      <p:nvGrpSpPr>
+        <p:cNvPr id="1" name=""/>
+        <p:cNvGrpSpPr/>
+        <p:nvPr/>
+      </p:nvGrpSpPr>
+      <p:grpSpPr>
+        <a:xfrm>
+          <a:off x="0" y="0"/>
+          <a:ext cx="0" cy="0"/>
+          <a:chOff x="0" y="0"/>
+          <a:chExt cx="0" cy="0"/>
+        </a:xfrm>
+      </p:grpSpPr>
+      <p:sp>
+        <p:nvSpPr>
+          <p:cNvPr id="2" name="Slide Image Placeholder 1"/>
+          <p:cNvSpPr>
+            <a:spLocks noGrp="1" noRot="1" noChangeAspect="1"/>
+          </p:cNvSpPr>
+          <p:nvPr>
+            <p:ph type="sldImg"/>
+          </p:nvPr>
+        </p:nvSpPr>
+        <p:spPr/>
+      </p:sp>
+      <p:sp>
+        <p:nvSpPr>
+          <p:cNvPr id="3" name="Notes Placeholder 2"/>
+          <p:cNvSpPr>
+            <a:spLocks noGrp="1"/>
+          </p:cNvSpPr>
+          <p:nvPr>
+            <p:ph type="body" idx="1"/>
+          </p:nvPr>
+        </p:nvSpPr>
+        <p:spPr/>
+        <p:txBody>
+          <a:bodyPr/>
+          <a:lstStyle/>
+          <a:p>
+            <a:endParaRPr lang="en-US" dirty="0"/>
+          </a:p>
+        </p:txBody>
+      </p:sp>
+      <p:sp>
+        <p:nvSpPr>
+          <p:cNvPr id="4" name="Slide Number Placeholder 3"/>
+          <p:cNvSpPr>
+            <a:spLocks noGrp="1"/>
+          </p:cNvSpPr>
+          <p:nvPr>
+            <p:ph type="sldNum" sz="quarter" idx="5"/>
+          </p:nvPr>
+        </p:nvSpPr>
+        <p:spPr/>
+        <p:txBody>
+          <a:bodyPr/>
+          <a:lstStyle/>
+          <a:p>
+            <a:fld id="{BF1DCC8B-EEAA-4D08-AA97-55EBEC4049D4}" type="slidenum">
+              <a:rPr lang="en-US" smtClean="0"/>
+              <a:t>9</a:t>
+            </a:fld>
+            <a:endParaRPr lang="en-US"/>
+          </a:p>
+        </p:txBody>
+      </p:sp>
+    </p:spTree>
+    <p:extLst>
+      <p:ext uri="{BB962C8B-B14F-4D97-AF65-F5344CB8AC3E}">
+        <p14:creationId xmlns:p14="http://schemas.microsoft.com/office/powerpoint/2010/main" val="3958801788"/>
+      </p:ext>
+    </p:extLst>
+  </p:cSld>
+  <p:clrMapOvr>
+    <a:masterClrMapping/>
+  </p:clrMapOvr>
+</p:notes>
+</file>
+
+<file path=ppt/notesSlides/notesSlide3.xml><?xml version="1.0" encoding="utf-8"?>
 <p:notes xmlns:a="http://schemas.openxmlformats.org/drawingml/2006/main" xmlns:r="http://schemas.openxmlformats.org/officeDocument/2006/relationships" xmlns:p="http://schemas.openxmlformats.org/presentationml/2006/main">
   <p:cSld>
     <p:spTree>
@@ -4443,13 +4526,13 @@
   <p:clrMapOvr>
     <a:masterClrMapping/>
   </p:clrMapOvr>
-  <mc:AlternateContent xmlns:mc="http://schemas.openxmlformats.org/markup-compatibility/2006">
-    <mc:Choice xmlns:p159="http://schemas.microsoft.com/office/powerpoint/2015/09/main" Requires="p159">
+  <mc:AlternateContent xmlns:mc="http://schemas.openxmlformats.org/markup-compatibility/2006" xmlns:p159="http://schemas.microsoft.com/office/powerpoint/2015/09/main">
+    <mc:Choice Requires="p159">
       <p:transition xmlns:p14="http://schemas.microsoft.com/office/powerpoint/2010/main" spd="slow" p14:dur="2000">
         <p159:morph option="byObject"/>
       </p:transition>
     </mc:Choice>
-    <mc:Fallback>
+    <mc:Fallback xmlns="">
       <p:transition spd="slow">
         <p:fade/>
       </p:transition>
@@ -4665,7 +4748,7 @@
                   <a:cs typeface="Open Sans Bold"/>
                   <a:sym typeface="Open Sans Bold"/>
                 </a:rPr>
-                <a:t>Luồng hệ thống RAG</a:t>
+                <a:t>Luồng RAG</a:t>
               </a:r>
               <a:endParaRPr lang="en-US" sz="3999" b="1" dirty="0">
                 <a:solidFill>
@@ -4812,10 +4895,10 @@
       </p:sp>
       <p:pic>
         <p:nvPicPr>
-          <p:cNvPr id="17" name="Picture 16">
+          <p:cNvPr id="10" name="Picture 9">
             <a:extLst>
               <a:ext uri="{FF2B5EF4-FFF2-40B4-BE49-F238E27FC236}">
-                <a16:creationId xmlns:a16="http://schemas.microsoft.com/office/drawing/2014/main" id="{7066EC65-C8B2-A917-43E2-6FC51FA09161}"/>
+                <a16:creationId xmlns:a16="http://schemas.microsoft.com/office/drawing/2014/main" id="{D6D036C7-A125-2C31-5BB4-E58D25FCE21A}"/>
               </a:ext>
             </a:extLst>
           </p:cNvPr>
@@ -4838,8 +4921,8 @@
         </p:blipFill>
         <p:spPr>
           <a:xfrm>
-            <a:off x="1809750" y="1295687"/>
-            <a:ext cx="14668500" cy="8255418"/>
+            <a:off x="1845379" y="1295687"/>
+            <a:ext cx="14597241" cy="8215313"/>
           </a:xfrm>
           <a:prstGeom prst="rect">
             <a:avLst/>
@@ -4856,13 +4939,13 @@
   <p:clrMapOvr>
     <a:masterClrMapping/>
   </p:clrMapOvr>
-  <mc:AlternateContent xmlns:mc="http://schemas.openxmlformats.org/markup-compatibility/2006">
-    <mc:Choice xmlns:p159="http://schemas.microsoft.com/office/powerpoint/2015/09/main" Requires="p159">
+  <mc:AlternateContent xmlns:mc="http://schemas.openxmlformats.org/markup-compatibility/2006" xmlns:p159="http://schemas.microsoft.com/office/powerpoint/2015/09/main">
+    <mc:Choice Requires="p159">
       <p:transition xmlns:p14="http://schemas.microsoft.com/office/powerpoint/2010/main" spd="slow" p14:dur="2000">
         <p159:morph option="byObject"/>
       </p:transition>
     </mc:Choice>
-    <mc:Fallback>
+    <mc:Fallback xmlns="">
       <p:transition spd="slow">
         <p:fade/>
       </p:transition>
@@ -8226,155 +8309,18 @@
           </p:txBody>
         </p:sp>
       </p:grpSp>
-      <p:grpSp>
-        <p:nvGrpSpPr>
-          <p:cNvPr id="66" name="Group 11">
-            <a:extLst>
-              <a:ext uri="{FF2B5EF4-FFF2-40B4-BE49-F238E27FC236}">
-                <a16:creationId xmlns:a16="http://schemas.microsoft.com/office/drawing/2014/main" id="{F91842A1-C387-B30E-6C7B-D488750DD508}"/>
-              </a:ext>
-            </a:extLst>
-          </p:cNvPr>
-          <p:cNvGrpSpPr/>
-          <p:nvPr/>
-        </p:nvGrpSpPr>
-        <p:grpSpPr>
-          <a:xfrm>
-            <a:off x="13134134" y="3697043"/>
-            <a:ext cx="3263364" cy="667286"/>
-            <a:chOff x="0" y="0"/>
-            <a:chExt cx="3189336" cy="663341"/>
-          </a:xfrm>
-        </p:grpSpPr>
-        <p:sp>
-          <p:nvSpPr>
-            <p:cNvPr id="67" name="Freeform 12">
-              <a:extLst>
-                <a:ext uri="{FF2B5EF4-FFF2-40B4-BE49-F238E27FC236}">
-                  <a16:creationId xmlns:a16="http://schemas.microsoft.com/office/drawing/2014/main" id="{3680612A-B966-7706-1D83-045DD314FD1E}"/>
-                </a:ext>
-              </a:extLst>
-            </p:cNvPr>
-            <p:cNvSpPr/>
-            <p:nvPr/>
-          </p:nvSpPr>
-          <p:spPr>
-            <a:xfrm>
-              <a:off x="0" y="0"/>
-              <a:ext cx="663341" cy="663341"/>
-            </a:xfrm>
-            <a:custGeom>
-              <a:avLst/>
-              <a:gdLst/>
-              <a:ahLst/>
-              <a:cxnLst/>
-              <a:rect l="l" t="t" r="r" b="b"/>
-              <a:pathLst>
-                <a:path w="663341" h="663341">
-                  <a:moveTo>
-                    <a:pt x="0" y="0"/>
-                  </a:moveTo>
-                  <a:lnTo>
-                    <a:pt x="663341" y="0"/>
-                  </a:lnTo>
-                  <a:lnTo>
-                    <a:pt x="663341" y="663341"/>
-                  </a:lnTo>
-                  <a:lnTo>
-                    <a:pt x="0" y="663341"/>
-                  </a:lnTo>
-                  <a:lnTo>
-                    <a:pt x="0" y="0"/>
-                  </a:lnTo>
-                  <a:close/>
-                </a:path>
-              </a:pathLst>
-            </a:custGeom>
-            <a:blipFill>
-              <a:blip>
-                <a:extLst>
-                  <a:ext uri="{96DAC541-7B7A-43D3-8B79-37D633B846F1}">
-                    <asvg:svgBlip xmlns:asvg="http://schemas.microsoft.com/office/drawing/2016/SVG/main" r:embed="rId5"/>
-                  </a:ext>
-                </a:extLst>
-              </a:blip>
-              <a:stretch>
-                <a:fillRect/>
-              </a:stretch>
-            </a:blipFill>
-          </p:spPr>
-          <p:txBody>
-            <a:bodyPr/>
-            <a:lstStyle/>
-            <a:p>
-              <a:endParaRPr lang="en-US"/>
-            </a:p>
-          </p:txBody>
-        </p:sp>
-        <p:sp>
-          <p:nvSpPr>
-            <p:cNvPr id="68" name="TextBox 13">
-              <a:extLst>
-                <a:ext uri="{FF2B5EF4-FFF2-40B4-BE49-F238E27FC236}">
-                  <a16:creationId xmlns:a16="http://schemas.microsoft.com/office/drawing/2014/main" id="{C780912C-1CFB-7EF9-AE9F-63D039B66061}"/>
-                </a:ext>
-              </a:extLst>
-            </p:cNvPr>
-            <p:cNvSpPr txBox="1"/>
-            <p:nvPr/>
-          </p:nvSpPr>
-          <p:spPr>
-            <a:xfrm>
-              <a:off x="867984" y="156067"/>
-              <a:ext cx="2321352" cy="283075"/>
-            </a:xfrm>
-            <a:prstGeom prst="rect">
-              <a:avLst/>
-            </a:prstGeom>
-          </p:spPr>
-          <p:txBody>
-            <a:bodyPr lIns="0" tIns="0" rIns="0" bIns="0" rtlCol="0" anchor="t">
-              <a:spAutoFit/>
-            </a:bodyPr>
-            <a:lstStyle/>
-            <a:p>
-              <a:pPr algn="l">
-                <a:lnSpc>
-                  <a:spcPts val="2057"/>
-                </a:lnSpc>
-                <a:spcBef>
-                  <a:spcPct val="0"/>
-                </a:spcBef>
-              </a:pPr>
-              <a:r>
-                <a:rPr lang="en-US" sz="2500" b="1" u="sng" dirty="0">
-                  <a:solidFill>
-                    <a:srgbClr val="1F2020"/>
-                  </a:solidFill>
-                  <a:latin typeface="Open Sans Bold"/>
-                  <a:ea typeface="Open Sans Bold"/>
-                  <a:cs typeface="Open Sans Bold"/>
-                  <a:sym typeface="Open Sans Bold"/>
-                  <a:hlinkClick r:id="rId6" tooltip="https://drive.google.com/drive/folders/1mbwKd_GUPrzOsvYDGJ6pnhkF9rXS1Gkp"/>
-                </a:rPr>
-                <a:t>Play Video</a:t>
-              </a:r>
-            </a:p>
-          </p:txBody>
-        </p:sp>
-      </p:grpSp>
     </p:spTree>
   </p:cSld>
   <p:clrMapOvr>
     <a:masterClrMapping/>
   </p:clrMapOvr>
-  <mc:AlternateContent xmlns:mc="http://schemas.openxmlformats.org/markup-compatibility/2006">
-    <mc:Choice xmlns:p159="http://schemas.microsoft.com/office/powerpoint/2015/09/main" Requires="p159">
+  <mc:AlternateContent xmlns:mc="http://schemas.openxmlformats.org/markup-compatibility/2006" xmlns:p159="http://schemas.microsoft.com/office/powerpoint/2015/09/main">
+    <mc:Choice Requires="p159">
       <p:transition xmlns:p14="http://schemas.microsoft.com/office/powerpoint/2010/main" spd="slow" p14:dur="2000">
         <p159:morph option="byObject"/>
       </p:transition>
     </mc:Choice>
-    <mc:Fallback>
+    <mc:Fallback xmlns="">
       <p:transition spd="slow">
         <p:fade/>
       </p:transition>
@@ -8653,13 +8599,13 @@
   <p:clrMapOvr>
     <a:masterClrMapping/>
   </p:clrMapOvr>
-  <mc:AlternateContent xmlns:mc="http://schemas.openxmlformats.org/markup-compatibility/2006">
-    <mc:Choice xmlns:p159="http://schemas.microsoft.com/office/powerpoint/2015/09/main" Requires="p159">
+  <mc:AlternateContent xmlns:mc="http://schemas.openxmlformats.org/markup-compatibility/2006" xmlns:p159="http://schemas.microsoft.com/office/powerpoint/2015/09/main">
+    <mc:Choice Requires="p159">
       <p:transition xmlns:p14="http://schemas.microsoft.com/office/powerpoint/2010/main" spd="slow" p14:dur="2000">
         <p159:morph option="byObject"/>
       </p:transition>
     </mc:Choice>
-    <mc:Fallback>
+    <mc:Fallback xmlns="">
       <p:transition spd="slow">
         <p:fade/>
       </p:transition>
@@ -13692,13 +13638,13 @@
   <p:clrMapOvr>
     <a:masterClrMapping/>
   </p:clrMapOvr>
-  <mc:AlternateContent xmlns:mc="http://schemas.openxmlformats.org/markup-compatibility/2006">
-    <mc:Choice xmlns:p159="http://schemas.microsoft.com/office/powerpoint/2015/09/main" Requires="p159">
+  <mc:AlternateContent xmlns:mc="http://schemas.openxmlformats.org/markup-compatibility/2006" xmlns:p159="http://schemas.microsoft.com/office/powerpoint/2015/09/main">
+    <mc:Choice Requires="p159">
       <p:transition xmlns:p14="http://schemas.microsoft.com/office/powerpoint/2010/main" spd="slow" p14:dur="2000">
         <p159:morph option="byObject"/>
       </p:transition>
     </mc:Choice>
-    <mc:Fallback>
+    <mc:Fallback xmlns="">
       <p:transition spd="slow">
         <p:fade/>
       </p:transition>
@@ -15685,13 +15631,13 @@
   <p:clrMapOvr>
     <a:masterClrMapping/>
   </p:clrMapOvr>
-  <mc:AlternateContent xmlns:mc="http://schemas.openxmlformats.org/markup-compatibility/2006">
-    <mc:Choice xmlns:p159="http://schemas.microsoft.com/office/powerpoint/2015/09/main" Requires="p159">
+  <mc:AlternateContent xmlns:mc="http://schemas.openxmlformats.org/markup-compatibility/2006" xmlns:p159="http://schemas.microsoft.com/office/powerpoint/2015/09/main">
+    <mc:Choice Requires="p159">
       <p:transition xmlns:p14="http://schemas.microsoft.com/office/powerpoint/2010/main" spd="slow" p14:dur="2000">
         <p159:morph option="byObject"/>
       </p:transition>
     </mc:Choice>
-    <mc:Fallback>
+    <mc:Fallback xmlns="">
       <p:transition spd="slow">
         <p:fade/>
       </p:transition>
@@ -17559,13 +17505,13 @@
   <p:clrMapOvr>
     <a:masterClrMapping/>
   </p:clrMapOvr>
-  <mc:AlternateContent xmlns:mc="http://schemas.openxmlformats.org/markup-compatibility/2006">
-    <mc:Choice xmlns:p159="http://schemas.microsoft.com/office/powerpoint/2015/09/main" Requires="p159">
+  <mc:AlternateContent xmlns:mc="http://schemas.openxmlformats.org/markup-compatibility/2006" xmlns:p159="http://schemas.microsoft.com/office/powerpoint/2015/09/main">
+    <mc:Choice Requires="p159">
       <p:transition xmlns:p14="http://schemas.microsoft.com/office/powerpoint/2010/main" spd="slow" p14:dur="2000">
         <p159:morph option="byObject"/>
       </p:transition>
     </mc:Choice>
-    <mc:Fallback>
+    <mc:Fallback xmlns="">
       <p:transition spd="slow">
         <p:fade/>
       </p:transition>
@@ -18641,13 +18587,13 @@
   <p:clrMapOvr>
     <a:masterClrMapping/>
   </p:clrMapOvr>
-  <mc:AlternateContent xmlns:mc="http://schemas.openxmlformats.org/markup-compatibility/2006">
-    <mc:Choice xmlns:p159="http://schemas.microsoft.com/office/powerpoint/2015/09/main" Requires="p159">
+  <mc:AlternateContent xmlns:mc="http://schemas.openxmlformats.org/markup-compatibility/2006" xmlns:p159="http://schemas.microsoft.com/office/powerpoint/2015/09/main">
+    <mc:Choice Requires="p159">
       <p:transition xmlns:p14="http://schemas.microsoft.com/office/powerpoint/2010/main" spd="slow" p14:dur="2000">
         <p159:morph option="byObject"/>
       </p:transition>
     </mc:Choice>
-    <mc:Fallback>
+    <mc:Fallback xmlns="">
       <p:transition spd="slow">
         <p:fade/>
       </p:transition>
@@ -19197,7 +19143,7 @@
               </a:spcBef>
             </a:pPr>
             <a:r>
-              <a:rPr lang="en-US" sz="1200">
+              <a:rPr lang="en-US" sz="1200" dirty="0">
                 <a:solidFill>
                   <a:srgbClr val="1F2020"/>
                 </a:solidFill>
@@ -19219,7 +19165,7 @@
         </p:nvSpPr>
         <p:spPr>
           <a:xfrm>
-            <a:off x="1191077" y="822395"/>
+            <a:off x="1191076" y="1103487"/>
             <a:ext cx="15905845" cy="4029075"/>
           </a:xfrm>
           <a:prstGeom prst="rect">
@@ -19238,13 +19184,13 @@
               </a:lnSpc>
             </a:pPr>
             <a:r>
-              <a:rPr lang="en-US" sz="7500" b="1">
+              <a:rPr lang="en-US" sz="7500" b="1" dirty="0">
                 <a:solidFill>
                   <a:srgbClr val="335ACF"/>
                 </a:solidFill>
-                <a:latin typeface="Poppins Bold"/>
-                <a:ea typeface="Poppins Bold"/>
-                <a:cs typeface="Poppins Bold"/>
+                <a:latin typeface="Open Sans Bold" panose="020B0806030504020204" charset="0"/>
+                <a:ea typeface="Open Sans Bold" panose="020B0806030504020204" charset="0"/>
+                <a:cs typeface="Open Sans Bold" panose="020B0806030504020204" charset="0"/>
                 <a:sym typeface="Poppins Bold"/>
               </a:rPr>
               <a:t>EM XIN TRÂN TRỌNG CẢM ƠN </a:t>
@@ -19257,13 +19203,13 @@
               </a:lnSpc>
             </a:pPr>
             <a:r>
-              <a:rPr lang="en-US" sz="7500" b="1">
+              <a:rPr lang="en-US" sz="7500" b="1" dirty="0">
                 <a:solidFill>
                   <a:srgbClr val="335ACF"/>
                 </a:solidFill>
-                <a:latin typeface="Poppins Bold"/>
-                <a:ea typeface="Poppins Bold"/>
-                <a:cs typeface="Poppins Bold"/>
+                <a:latin typeface="Open Sans Bold" panose="020B0806030504020204" charset="0"/>
+                <a:ea typeface="Open Sans Bold" panose="020B0806030504020204" charset="0"/>
+                <a:cs typeface="Open Sans Bold" panose="020B0806030504020204" charset="0"/>
                 <a:sym typeface="Poppins Bold"/>
               </a:rPr>
               <a:t>THẦY CÔ VÀ CÁC BẠN ĐÃ CHÚ Ý </a:t>
@@ -19279,13 +19225,13 @@
               </a:spcBef>
             </a:pPr>
             <a:r>
-              <a:rPr lang="en-US" sz="7500" b="1">
+              <a:rPr lang="en-US" sz="7500" b="1" dirty="0">
                 <a:solidFill>
                   <a:srgbClr val="335ACF"/>
                 </a:solidFill>
-                <a:latin typeface="Poppins Bold"/>
-                <a:ea typeface="Poppins Bold"/>
-                <a:cs typeface="Poppins Bold"/>
+                <a:latin typeface="Open Sans Bold" panose="020B0806030504020204" charset="0"/>
+                <a:ea typeface="Open Sans Bold" panose="020B0806030504020204" charset="0"/>
+                <a:cs typeface="Open Sans Bold" panose="020B0806030504020204" charset="0"/>
                 <a:sym typeface="Poppins Bold"/>
               </a:rPr>
               <a:t>LẮNG NGHE</a:t>
@@ -23462,13 +23408,13 @@
   <p:clrMapOvr>
     <a:masterClrMapping/>
   </p:clrMapOvr>
-  <mc:AlternateContent xmlns:mc="http://schemas.openxmlformats.org/markup-compatibility/2006">
-    <mc:Choice xmlns:p159="http://schemas.microsoft.com/office/powerpoint/2015/09/main" Requires="p159">
+  <mc:AlternateContent xmlns:mc="http://schemas.openxmlformats.org/markup-compatibility/2006" xmlns:p159="http://schemas.microsoft.com/office/powerpoint/2015/09/main">
+    <mc:Choice Requires="p159">
       <p:transition xmlns:p14="http://schemas.microsoft.com/office/powerpoint/2010/main" spd="slow" p14:dur="2000">
         <p159:morph option="byObject"/>
       </p:transition>
     </mc:Choice>
-    <mc:Fallback>
+    <mc:Fallback xmlns="">
       <p:transition spd="slow">
         <p:fade/>
       </p:transition>
@@ -26334,13 +26280,13 @@
   <p:clrMapOvr>
     <a:masterClrMapping/>
   </p:clrMapOvr>
-  <mc:AlternateContent xmlns:mc="http://schemas.openxmlformats.org/markup-compatibility/2006">
-    <mc:Choice xmlns:p159="http://schemas.microsoft.com/office/powerpoint/2015/09/main" Requires="p159">
+  <mc:AlternateContent xmlns:mc="http://schemas.openxmlformats.org/markup-compatibility/2006" xmlns:p159="http://schemas.microsoft.com/office/powerpoint/2015/09/main">
+    <mc:Choice Requires="p159">
       <p:transition xmlns:p14="http://schemas.microsoft.com/office/powerpoint/2010/main" spd="slow" p14:dur="2000">
         <p159:morph option="byObject"/>
       </p:transition>
     </mc:Choice>
-    <mc:Fallback>
+    <mc:Fallback xmlns="">
       <p:transition spd="slow">
         <p:fade/>
       </p:transition>
@@ -27216,13 +27162,13 @@
   <p:clrMapOvr>
     <a:masterClrMapping/>
   </p:clrMapOvr>
-  <mc:AlternateContent xmlns:mc="http://schemas.openxmlformats.org/markup-compatibility/2006">
-    <mc:Choice xmlns:p159="http://schemas.microsoft.com/office/powerpoint/2015/09/main" Requires="p159">
+  <mc:AlternateContent xmlns:mc="http://schemas.openxmlformats.org/markup-compatibility/2006" xmlns:p159="http://schemas.microsoft.com/office/powerpoint/2015/09/main">
+    <mc:Choice Requires="p159">
       <p:transition xmlns:p14="http://schemas.microsoft.com/office/powerpoint/2010/main" spd="slow" p14:dur="2000">
         <p159:morph option="byObject"/>
       </p:transition>
     </mc:Choice>
-    <mc:Fallback>
+    <mc:Fallback xmlns="">
       <p:transition spd="slow">
         <p:fade/>
       </p:transition>
@@ -28016,7 +27962,7 @@
                 </a:spcBef>
               </a:pPr>
               <a:r>
-                <a:rPr lang="en-US" sz="3999" b="1">
+                <a:rPr lang="en-US" sz="3999" b="1" dirty="0">
                   <a:solidFill>
                     <a:srgbClr val="1F2020"/>
                   </a:solidFill>
@@ -28025,8 +27971,77 @@
                   <a:cs typeface="Open Sans Bold"/>
                   <a:sym typeface="Open Sans Bold"/>
                 </a:rPr>
-                <a:t>Lý do chọn đề tài</a:t>
+                <a:t>Lý do </a:t>
               </a:r>
+              <a:r>
+                <a:rPr lang="en-US" sz="3999" b="1" dirty="0" err="1">
+                  <a:solidFill>
+                    <a:srgbClr val="1F2020"/>
+                  </a:solidFill>
+                  <a:latin typeface="Open Sans Bold"/>
+                  <a:ea typeface="Open Sans Bold"/>
+                  <a:cs typeface="Open Sans Bold"/>
+                  <a:sym typeface="Open Sans Bold"/>
+                </a:rPr>
+                <a:t>chọn</a:t>
+              </a:r>
+              <a:r>
+                <a:rPr lang="en-US" sz="3999" b="1" dirty="0">
+                  <a:solidFill>
+                    <a:srgbClr val="1F2020"/>
+                  </a:solidFill>
+                  <a:latin typeface="Open Sans Bold"/>
+                  <a:ea typeface="Open Sans Bold"/>
+                  <a:cs typeface="Open Sans Bold"/>
+                  <a:sym typeface="Open Sans Bold"/>
+                </a:rPr>
+                <a:t> </a:t>
+              </a:r>
+              <a:r>
+                <a:rPr lang="en-US" sz="3999" b="1" dirty="0" err="1">
+                  <a:solidFill>
+                    <a:srgbClr val="1F2020"/>
+                  </a:solidFill>
+                  <a:latin typeface="Open Sans Bold"/>
+                  <a:ea typeface="Open Sans Bold"/>
+                  <a:cs typeface="Open Sans Bold"/>
+                  <a:sym typeface="Open Sans Bold"/>
+                </a:rPr>
+                <a:t>đề</a:t>
+              </a:r>
+              <a:r>
+                <a:rPr lang="en-US" sz="3999" b="1" dirty="0">
+                  <a:solidFill>
+                    <a:srgbClr val="1F2020"/>
+                  </a:solidFill>
+                  <a:latin typeface="Open Sans Bold"/>
+                  <a:ea typeface="Open Sans Bold"/>
+                  <a:cs typeface="Open Sans Bold"/>
+                  <a:sym typeface="Open Sans Bold"/>
+                </a:rPr>
+                <a:t> </a:t>
+              </a:r>
+              <a:r>
+                <a:rPr lang="en-US" sz="3999" b="1" dirty="0" err="1">
+                  <a:solidFill>
+                    <a:srgbClr val="1F2020"/>
+                  </a:solidFill>
+                  <a:latin typeface="Open Sans Bold"/>
+                  <a:ea typeface="Open Sans Bold"/>
+                  <a:cs typeface="Open Sans Bold"/>
+                  <a:sym typeface="Open Sans Bold"/>
+                </a:rPr>
+                <a:t>tài</a:t>
+              </a:r>
+              <a:endParaRPr lang="en-US" sz="3999" b="1" dirty="0">
+                <a:solidFill>
+                  <a:srgbClr val="1F2020"/>
+                </a:solidFill>
+                <a:latin typeface="Open Sans Bold"/>
+                <a:ea typeface="Open Sans Bold"/>
+                <a:cs typeface="Open Sans Bold"/>
+                <a:sym typeface="Open Sans Bold"/>
+              </a:endParaRPr>
             </a:p>
           </p:txBody>
         </p:sp>
@@ -28371,16 +28386,232 @@
               <a:buChar char="•"/>
             </a:pPr>
             <a:r>
-              <a:rPr lang="en-US" sz="3500">
-                <a:solidFill>
-                  <a:srgbClr val="1F2020"/>
-                </a:solidFill>
-                <a:latin typeface="Open Sans"/>
-                <a:ea typeface="Open Sans"/>
-                <a:cs typeface="Open Sans"/>
-                <a:sym typeface="Open Sans"/>
-              </a:rPr>
-              <a:t>Khách hàng nhắn từ nhiều kênh: Facebook,  Instagram, Telegram, Zalo và website riêng.</a:t>
+              <a:rPr lang="vi-VN" sz="3500" dirty="0">
+                <a:solidFill>
+                  <a:srgbClr val="1F2020"/>
+                </a:solidFill>
+                <a:latin typeface="Open Sans"/>
+                <a:ea typeface="Open Sans"/>
+                <a:cs typeface="Open Sans"/>
+                <a:sym typeface="Open Sans"/>
+              </a:rPr>
+              <a:t>Hoạt động chăm sóc k</a:t>
+            </a:r>
+            <a:r>
+              <a:rPr lang="en-US" sz="3500" dirty="0" err="1">
+                <a:solidFill>
+                  <a:srgbClr val="1F2020"/>
+                </a:solidFill>
+                <a:latin typeface="Open Sans"/>
+                <a:ea typeface="Open Sans"/>
+                <a:cs typeface="Open Sans"/>
+                <a:sym typeface="Open Sans"/>
+              </a:rPr>
+              <a:t>hách</a:t>
+            </a:r>
+            <a:r>
+              <a:rPr lang="en-US" sz="3500" dirty="0">
+                <a:solidFill>
+                  <a:srgbClr val="1F2020"/>
+                </a:solidFill>
+                <a:latin typeface="Open Sans"/>
+                <a:ea typeface="Open Sans"/>
+                <a:cs typeface="Open Sans"/>
+                <a:sym typeface="Open Sans"/>
+              </a:rPr>
+              <a:t> </a:t>
+            </a:r>
+            <a:r>
+              <a:rPr lang="en-US" sz="3500" dirty="0" err="1">
+                <a:solidFill>
+                  <a:srgbClr val="1F2020"/>
+                </a:solidFill>
+                <a:latin typeface="Open Sans"/>
+                <a:ea typeface="Open Sans"/>
+                <a:cs typeface="Open Sans"/>
+                <a:sym typeface="Open Sans"/>
+              </a:rPr>
+              <a:t>hàng</a:t>
+            </a:r>
+            <a:r>
+              <a:rPr lang="en-US" sz="3500" dirty="0">
+                <a:solidFill>
+                  <a:srgbClr val="1F2020"/>
+                </a:solidFill>
+                <a:latin typeface="Open Sans"/>
+                <a:ea typeface="Open Sans"/>
+                <a:cs typeface="Open Sans"/>
+                <a:sym typeface="Open Sans"/>
+              </a:rPr>
+              <a:t> </a:t>
+            </a:r>
+            <a:r>
+              <a:rPr lang="en-US" sz="3500" dirty="0" err="1">
+                <a:solidFill>
+                  <a:srgbClr val="1F2020"/>
+                </a:solidFill>
+                <a:latin typeface="Open Sans"/>
+                <a:ea typeface="Open Sans"/>
+                <a:cs typeface="Open Sans"/>
+                <a:sym typeface="Open Sans"/>
+              </a:rPr>
+              <a:t>nhắn</a:t>
+            </a:r>
+            <a:r>
+              <a:rPr lang="en-US" sz="3500" dirty="0">
+                <a:solidFill>
+                  <a:srgbClr val="1F2020"/>
+                </a:solidFill>
+                <a:latin typeface="Open Sans"/>
+                <a:ea typeface="Open Sans"/>
+                <a:cs typeface="Open Sans"/>
+                <a:sym typeface="Open Sans"/>
+              </a:rPr>
+              <a:t> </a:t>
+            </a:r>
+            <a:r>
+              <a:rPr lang="en-US" sz="3500" dirty="0" err="1">
+                <a:solidFill>
+                  <a:srgbClr val="1F2020"/>
+                </a:solidFill>
+                <a:latin typeface="Open Sans"/>
+                <a:ea typeface="Open Sans"/>
+                <a:cs typeface="Open Sans"/>
+                <a:sym typeface="Open Sans"/>
+              </a:rPr>
+              <a:t>từ</a:t>
+            </a:r>
+            <a:r>
+              <a:rPr lang="en-US" sz="3500" dirty="0">
+                <a:solidFill>
+                  <a:srgbClr val="1F2020"/>
+                </a:solidFill>
+                <a:latin typeface="Open Sans"/>
+                <a:ea typeface="Open Sans"/>
+                <a:cs typeface="Open Sans"/>
+                <a:sym typeface="Open Sans"/>
+              </a:rPr>
+              <a:t> </a:t>
+            </a:r>
+            <a:r>
+              <a:rPr lang="en-US" sz="3500" dirty="0" err="1">
+                <a:solidFill>
+                  <a:srgbClr val="1F2020"/>
+                </a:solidFill>
+                <a:latin typeface="Open Sans"/>
+                <a:ea typeface="Open Sans"/>
+                <a:cs typeface="Open Sans"/>
+                <a:sym typeface="Open Sans"/>
+              </a:rPr>
+              <a:t>nhiều</a:t>
+            </a:r>
+            <a:r>
+              <a:rPr lang="en-US" sz="3500" dirty="0">
+                <a:solidFill>
+                  <a:srgbClr val="1F2020"/>
+                </a:solidFill>
+                <a:latin typeface="Open Sans"/>
+                <a:ea typeface="Open Sans"/>
+                <a:cs typeface="Open Sans"/>
+                <a:sym typeface="Open Sans"/>
+              </a:rPr>
+              <a:t> </a:t>
+            </a:r>
+            <a:r>
+              <a:rPr lang="en-US" sz="3500" dirty="0" err="1">
+                <a:solidFill>
+                  <a:srgbClr val="1F2020"/>
+                </a:solidFill>
+                <a:latin typeface="Open Sans"/>
+                <a:ea typeface="Open Sans"/>
+                <a:cs typeface="Open Sans"/>
+                <a:sym typeface="Open Sans"/>
+              </a:rPr>
+              <a:t>kênh</a:t>
+            </a:r>
+            <a:r>
+              <a:rPr lang="en-US" sz="3500" dirty="0">
+                <a:solidFill>
+                  <a:srgbClr val="1F2020"/>
+                </a:solidFill>
+                <a:latin typeface="Open Sans"/>
+                <a:ea typeface="Open Sans"/>
+                <a:cs typeface="Open Sans"/>
+                <a:sym typeface="Open Sans"/>
+              </a:rPr>
+              <a:t>: Facebook,  Instagram, Telegram, </a:t>
+            </a:r>
+            <a:r>
+              <a:rPr lang="en-US" sz="3500" dirty="0" err="1">
+                <a:solidFill>
+                  <a:srgbClr val="1F2020"/>
+                </a:solidFill>
+                <a:latin typeface="Open Sans"/>
+                <a:ea typeface="Open Sans"/>
+                <a:cs typeface="Open Sans"/>
+                <a:sym typeface="Open Sans"/>
+              </a:rPr>
+              <a:t>Zalo</a:t>
+            </a:r>
+            <a:r>
+              <a:rPr lang="en-US" sz="3500" dirty="0">
+                <a:solidFill>
+                  <a:srgbClr val="1F2020"/>
+                </a:solidFill>
+                <a:latin typeface="Open Sans"/>
+                <a:ea typeface="Open Sans"/>
+                <a:cs typeface="Open Sans"/>
+                <a:sym typeface="Open Sans"/>
+              </a:rPr>
+              <a:t> </a:t>
+            </a:r>
+            <a:r>
+              <a:rPr lang="en-US" sz="3500" dirty="0" err="1">
+                <a:solidFill>
+                  <a:srgbClr val="1F2020"/>
+                </a:solidFill>
+                <a:latin typeface="Open Sans"/>
+                <a:ea typeface="Open Sans"/>
+                <a:cs typeface="Open Sans"/>
+                <a:sym typeface="Open Sans"/>
+              </a:rPr>
+              <a:t>và</a:t>
+            </a:r>
+            <a:r>
+              <a:rPr lang="en-US" sz="3500" dirty="0">
+                <a:solidFill>
+                  <a:srgbClr val="1F2020"/>
+                </a:solidFill>
+                <a:latin typeface="Open Sans"/>
+                <a:ea typeface="Open Sans"/>
+                <a:cs typeface="Open Sans"/>
+                <a:sym typeface="Open Sans"/>
+              </a:rPr>
+              <a:t> website </a:t>
+            </a:r>
+            <a:r>
+              <a:rPr lang="en-US" sz="3500" dirty="0" err="1">
+                <a:solidFill>
+                  <a:srgbClr val="1F2020"/>
+                </a:solidFill>
+                <a:latin typeface="Open Sans"/>
+                <a:ea typeface="Open Sans"/>
+                <a:cs typeface="Open Sans"/>
+                <a:sym typeface="Open Sans"/>
+              </a:rPr>
+              <a:t>riêng</a:t>
+            </a:r>
+            <a:r>
+              <a:rPr lang="en-US" sz="3500" dirty="0">
+                <a:solidFill>
+                  <a:srgbClr val="1F2020"/>
+                </a:solidFill>
+                <a:latin typeface="Open Sans"/>
+                <a:ea typeface="Open Sans"/>
+                <a:cs typeface="Open Sans"/>
+                <a:sym typeface="Open Sans"/>
+              </a:rPr>
+              <a:t>.</a:t>
             </a:r>
           </a:p>
           <a:p>
@@ -28392,6 +28623,222 @@
               <a:buChar char="•"/>
             </a:pPr>
             <a:r>
+              <a:rPr lang="en-US" sz="3500" dirty="0">
+                <a:solidFill>
+                  <a:srgbClr val="1F2020"/>
+                </a:solidFill>
+                <a:latin typeface="Open Sans"/>
+                <a:ea typeface="Open Sans"/>
+                <a:cs typeface="Open Sans"/>
+                <a:sym typeface="Open Sans"/>
+              </a:rPr>
+              <a:t>Doanh </a:t>
+            </a:r>
+            <a:r>
+              <a:rPr lang="en-US" sz="3500" dirty="0" err="1">
+                <a:solidFill>
+                  <a:srgbClr val="1F2020"/>
+                </a:solidFill>
+                <a:latin typeface="Open Sans"/>
+                <a:ea typeface="Open Sans"/>
+                <a:cs typeface="Open Sans"/>
+                <a:sym typeface="Open Sans"/>
+              </a:rPr>
+              <a:t>nghiệp</a:t>
+            </a:r>
+            <a:r>
+              <a:rPr lang="en-US" sz="3500" dirty="0">
+                <a:solidFill>
+                  <a:srgbClr val="1F2020"/>
+                </a:solidFill>
+                <a:latin typeface="Open Sans"/>
+                <a:ea typeface="Open Sans"/>
+                <a:cs typeface="Open Sans"/>
+                <a:sym typeface="Open Sans"/>
+              </a:rPr>
+              <a:t> </a:t>
+            </a:r>
+            <a:r>
+              <a:rPr lang="vi-VN" sz="3500" dirty="0">
+                <a:solidFill>
+                  <a:srgbClr val="1F2020"/>
+                </a:solidFill>
+                <a:latin typeface="Open Sans"/>
+                <a:ea typeface="Open Sans"/>
+                <a:cs typeface="Open Sans"/>
+                <a:sym typeface="Open Sans"/>
+              </a:rPr>
+              <a:t>vừa và </a:t>
+            </a:r>
+            <a:r>
+              <a:rPr lang="en-US" sz="3500" dirty="0" err="1">
+                <a:solidFill>
+                  <a:srgbClr val="1F2020"/>
+                </a:solidFill>
+                <a:latin typeface="Open Sans"/>
+                <a:ea typeface="Open Sans"/>
+                <a:cs typeface="Open Sans"/>
+                <a:sym typeface="Open Sans"/>
+              </a:rPr>
+              <a:t>nhỏ</a:t>
+            </a:r>
+            <a:r>
+              <a:rPr lang="en-US" sz="3500" dirty="0">
+                <a:solidFill>
+                  <a:srgbClr val="1F2020"/>
+                </a:solidFill>
+                <a:latin typeface="Open Sans"/>
+                <a:ea typeface="Open Sans"/>
+                <a:cs typeface="Open Sans"/>
+                <a:sym typeface="Open Sans"/>
+              </a:rPr>
+              <a:t> </a:t>
+            </a:r>
+            <a:r>
+              <a:rPr lang="en-US" sz="3500" dirty="0" err="1">
+                <a:solidFill>
+                  <a:srgbClr val="1F2020"/>
+                </a:solidFill>
+                <a:latin typeface="Open Sans"/>
+                <a:ea typeface="Open Sans"/>
+                <a:cs typeface="Open Sans"/>
+                <a:sym typeface="Open Sans"/>
+              </a:rPr>
+              <a:t>khó</a:t>
+            </a:r>
+            <a:r>
+              <a:rPr lang="vi-VN" sz="3500" dirty="0">
+                <a:solidFill>
+                  <a:srgbClr val="1F2020"/>
+                </a:solidFill>
+                <a:latin typeface="Open Sans"/>
+                <a:ea typeface="Open Sans"/>
+                <a:cs typeface="Open Sans"/>
+                <a:sym typeface="Open Sans"/>
+              </a:rPr>
+              <a:t> để</a:t>
+            </a:r>
+            <a:r>
+              <a:rPr lang="en-US" sz="3500" dirty="0">
+                <a:solidFill>
+                  <a:srgbClr val="1F2020"/>
+                </a:solidFill>
+                <a:latin typeface="Open Sans"/>
+                <a:ea typeface="Open Sans"/>
+                <a:cs typeface="Open Sans"/>
+                <a:sym typeface="Open Sans"/>
+              </a:rPr>
+              <a:t> </a:t>
+            </a:r>
+            <a:r>
+              <a:rPr lang="en-US" sz="3500" dirty="0" err="1">
+                <a:solidFill>
+                  <a:srgbClr val="1F2020"/>
+                </a:solidFill>
+                <a:latin typeface="Open Sans"/>
+                <a:ea typeface="Open Sans"/>
+                <a:cs typeface="Open Sans"/>
+                <a:sym typeface="Open Sans"/>
+              </a:rPr>
+              <a:t>theo</a:t>
+            </a:r>
+            <a:r>
+              <a:rPr lang="en-US" sz="3500" dirty="0">
+                <a:solidFill>
+                  <a:srgbClr val="1F2020"/>
+                </a:solidFill>
+                <a:latin typeface="Open Sans"/>
+                <a:ea typeface="Open Sans"/>
+                <a:cs typeface="Open Sans"/>
+                <a:sym typeface="Open Sans"/>
+              </a:rPr>
+              <a:t> </a:t>
+            </a:r>
+            <a:r>
+              <a:rPr lang="en-US" sz="3500" dirty="0" err="1">
+                <a:solidFill>
+                  <a:srgbClr val="1F2020"/>
+                </a:solidFill>
+                <a:latin typeface="Open Sans"/>
+                <a:ea typeface="Open Sans"/>
+                <a:cs typeface="Open Sans"/>
+                <a:sym typeface="Open Sans"/>
+              </a:rPr>
+              <a:t>dõi</a:t>
+            </a:r>
+            <a:r>
+              <a:rPr lang="en-US" sz="3500" dirty="0">
+                <a:solidFill>
+                  <a:srgbClr val="1F2020"/>
+                </a:solidFill>
+                <a:latin typeface="Open Sans"/>
+                <a:ea typeface="Open Sans"/>
+                <a:cs typeface="Open Sans"/>
+                <a:sym typeface="Open Sans"/>
+              </a:rPr>
+              <a:t> </a:t>
+            </a:r>
+            <a:r>
+              <a:rPr lang="en-US" sz="3500" dirty="0" err="1">
+                <a:solidFill>
+                  <a:srgbClr val="1F2020"/>
+                </a:solidFill>
+                <a:latin typeface="Open Sans"/>
+                <a:ea typeface="Open Sans"/>
+                <a:cs typeface="Open Sans"/>
+                <a:sym typeface="Open Sans"/>
+              </a:rPr>
+              <a:t>hội</a:t>
+            </a:r>
+            <a:r>
+              <a:rPr lang="en-US" sz="3500" dirty="0">
+                <a:solidFill>
+                  <a:srgbClr val="1F2020"/>
+                </a:solidFill>
+                <a:latin typeface="Open Sans"/>
+                <a:ea typeface="Open Sans"/>
+                <a:cs typeface="Open Sans"/>
+                <a:sym typeface="Open Sans"/>
+              </a:rPr>
+              <a:t> </a:t>
+            </a:r>
+            <a:r>
+              <a:rPr lang="en-US" sz="3500" dirty="0" err="1">
+                <a:solidFill>
+                  <a:srgbClr val="1F2020"/>
+                </a:solidFill>
+                <a:latin typeface="Open Sans"/>
+                <a:ea typeface="Open Sans"/>
+                <a:cs typeface="Open Sans"/>
+                <a:sym typeface="Open Sans"/>
+              </a:rPr>
+              <a:t>thoại</a:t>
+            </a:r>
+            <a:r>
+              <a:rPr lang="en-US" sz="3500" dirty="0">
+                <a:solidFill>
+                  <a:srgbClr val="1F2020"/>
+                </a:solidFill>
+                <a:latin typeface="Open Sans"/>
+                <a:ea typeface="Open Sans"/>
+                <a:cs typeface="Open Sans"/>
+                <a:sym typeface="Open Sans"/>
+              </a:rPr>
+              <a:t>, </a:t>
+            </a:r>
+            <a:r>
+              <a:rPr lang="vi-VN" sz="3500">
+                <a:solidFill>
+                  <a:srgbClr val="1F2020"/>
+                </a:solidFill>
+                <a:latin typeface="Open Sans"/>
+                <a:ea typeface="Open Sans"/>
+                <a:cs typeface="Open Sans"/>
+                <a:sym typeface="Open Sans"/>
+              </a:rPr>
+              <a:t>bỏ lỡ tin nhắn</a:t>
+            </a:r>
+            <a:r>
               <a:rPr lang="en-US" sz="3500">
                 <a:solidFill>
                   <a:srgbClr val="1F2020"/>
@@ -28401,7 +28848,127 @@
                 <a:cs typeface="Open Sans"/>
                 <a:sym typeface="Open Sans"/>
               </a:rPr>
-              <a:t>Doanh nghiệp nhỏ khó theo dõi hội thoại, phân công nhân viên và phản hồi kịp thời.</a:t>
+              <a:t> </a:t>
+            </a:r>
+            <a:r>
+              <a:rPr lang="en-US" sz="3500" dirty="0" err="1">
+                <a:solidFill>
+                  <a:srgbClr val="1F2020"/>
+                </a:solidFill>
+                <a:latin typeface="Open Sans"/>
+                <a:ea typeface="Open Sans"/>
+                <a:cs typeface="Open Sans"/>
+                <a:sym typeface="Open Sans"/>
+              </a:rPr>
+              <a:t>và</a:t>
+            </a:r>
+            <a:r>
+              <a:rPr lang="en-US" sz="3500" dirty="0">
+                <a:solidFill>
+                  <a:srgbClr val="1F2020"/>
+                </a:solidFill>
+                <a:latin typeface="Open Sans"/>
+                <a:ea typeface="Open Sans"/>
+                <a:cs typeface="Open Sans"/>
+                <a:sym typeface="Open Sans"/>
+              </a:rPr>
+              <a:t> </a:t>
+            </a:r>
+            <a:r>
+              <a:rPr lang="en-US" sz="3500" dirty="0" err="1">
+                <a:solidFill>
+                  <a:srgbClr val="1F2020"/>
+                </a:solidFill>
+                <a:latin typeface="Open Sans"/>
+                <a:ea typeface="Open Sans"/>
+                <a:cs typeface="Open Sans"/>
+                <a:sym typeface="Open Sans"/>
+              </a:rPr>
+              <a:t>phản</a:t>
+            </a:r>
+            <a:r>
+              <a:rPr lang="en-US" sz="3500" dirty="0">
+                <a:solidFill>
+                  <a:srgbClr val="1F2020"/>
+                </a:solidFill>
+                <a:latin typeface="Open Sans"/>
+                <a:ea typeface="Open Sans"/>
+                <a:cs typeface="Open Sans"/>
+                <a:sym typeface="Open Sans"/>
+              </a:rPr>
+              <a:t> </a:t>
+            </a:r>
+            <a:r>
+              <a:rPr lang="en-US" sz="3500" dirty="0" err="1">
+                <a:solidFill>
+                  <a:srgbClr val="1F2020"/>
+                </a:solidFill>
+                <a:latin typeface="Open Sans"/>
+                <a:ea typeface="Open Sans"/>
+                <a:cs typeface="Open Sans"/>
+                <a:sym typeface="Open Sans"/>
+              </a:rPr>
+              <a:t>hồi</a:t>
+            </a:r>
+            <a:r>
+              <a:rPr lang="en-US" sz="3500" dirty="0">
+                <a:solidFill>
+                  <a:srgbClr val="1F2020"/>
+                </a:solidFill>
+                <a:latin typeface="Open Sans"/>
+                <a:ea typeface="Open Sans"/>
+                <a:cs typeface="Open Sans"/>
+                <a:sym typeface="Open Sans"/>
+              </a:rPr>
+              <a:t> </a:t>
+            </a:r>
+            <a:r>
+              <a:rPr lang="en-US" sz="3500" dirty="0" err="1">
+                <a:solidFill>
+                  <a:srgbClr val="1F2020"/>
+                </a:solidFill>
+                <a:latin typeface="Open Sans"/>
+                <a:ea typeface="Open Sans"/>
+                <a:cs typeface="Open Sans"/>
+                <a:sym typeface="Open Sans"/>
+              </a:rPr>
+              <a:t>kịp</a:t>
+            </a:r>
+            <a:r>
+              <a:rPr lang="en-US" sz="3500" dirty="0">
+                <a:solidFill>
+                  <a:srgbClr val="1F2020"/>
+                </a:solidFill>
+                <a:latin typeface="Open Sans"/>
+                <a:ea typeface="Open Sans"/>
+                <a:cs typeface="Open Sans"/>
+                <a:sym typeface="Open Sans"/>
+              </a:rPr>
+              <a:t> </a:t>
+            </a:r>
+            <a:r>
+              <a:rPr lang="en-US" sz="3500" dirty="0" err="1">
+                <a:solidFill>
+                  <a:srgbClr val="1F2020"/>
+                </a:solidFill>
+                <a:latin typeface="Open Sans"/>
+                <a:ea typeface="Open Sans"/>
+                <a:cs typeface="Open Sans"/>
+                <a:sym typeface="Open Sans"/>
+              </a:rPr>
+              <a:t>thời</a:t>
+            </a:r>
+            <a:r>
+              <a:rPr lang="en-US" sz="3500" dirty="0">
+                <a:solidFill>
+                  <a:srgbClr val="1F2020"/>
+                </a:solidFill>
+                <a:latin typeface="Open Sans"/>
+                <a:ea typeface="Open Sans"/>
+                <a:cs typeface="Open Sans"/>
+                <a:sym typeface="Open Sans"/>
+              </a:rPr>
+              <a:t>.</a:t>
             </a:r>
           </a:p>
           <a:p>
@@ -28416,16 +28983,292 @@
               <a:buChar char="•"/>
             </a:pPr>
             <a:r>
-              <a:rPr lang="en-US" sz="3500">
-                <a:solidFill>
-                  <a:srgbClr val="1F2020"/>
-                </a:solidFill>
-                <a:latin typeface="Open Sans"/>
-                <a:ea typeface="Open Sans"/>
-                <a:cs typeface="Open Sans"/>
-                <a:sym typeface="Open Sans"/>
-              </a:rPr>
-              <a:t>Thiếu dữ liệu tập trung để tư vấn khách hàng chính xác.</a:t>
+              <a:rPr lang="en-US" sz="3500" dirty="0" err="1">
+                <a:solidFill>
+                  <a:srgbClr val="1F2020"/>
+                </a:solidFill>
+                <a:latin typeface="Open Sans"/>
+                <a:ea typeface="Open Sans"/>
+                <a:cs typeface="Open Sans"/>
+                <a:sym typeface="Open Sans"/>
+              </a:rPr>
+              <a:t>Thiếu</a:t>
+            </a:r>
+            <a:r>
+              <a:rPr lang="en-US" sz="3500" dirty="0">
+                <a:solidFill>
+                  <a:srgbClr val="1F2020"/>
+                </a:solidFill>
+                <a:latin typeface="Open Sans"/>
+                <a:ea typeface="Open Sans"/>
+                <a:cs typeface="Open Sans"/>
+                <a:sym typeface="Open Sans"/>
+              </a:rPr>
+              <a:t> </a:t>
+            </a:r>
+            <a:r>
+              <a:rPr lang="en-US" sz="3500" dirty="0" err="1">
+                <a:solidFill>
+                  <a:srgbClr val="1F2020"/>
+                </a:solidFill>
+                <a:latin typeface="Open Sans"/>
+                <a:ea typeface="Open Sans"/>
+                <a:cs typeface="Open Sans"/>
+                <a:sym typeface="Open Sans"/>
+              </a:rPr>
+              <a:t>dữ</a:t>
+            </a:r>
+            <a:r>
+              <a:rPr lang="en-US" sz="3500" dirty="0">
+                <a:solidFill>
+                  <a:srgbClr val="1F2020"/>
+                </a:solidFill>
+                <a:latin typeface="Open Sans"/>
+                <a:ea typeface="Open Sans"/>
+                <a:cs typeface="Open Sans"/>
+                <a:sym typeface="Open Sans"/>
+              </a:rPr>
+              <a:t> </a:t>
+            </a:r>
+            <a:r>
+              <a:rPr lang="en-US" sz="3500" dirty="0" err="1">
+                <a:solidFill>
+                  <a:srgbClr val="1F2020"/>
+                </a:solidFill>
+                <a:latin typeface="Open Sans"/>
+                <a:ea typeface="Open Sans"/>
+                <a:cs typeface="Open Sans"/>
+                <a:sym typeface="Open Sans"/>
+              </a:rPr>
+              <a:t>liệu</a:t>
+            </a:r>
+            <a:r>
+              <a:rPr lang="en-US" sz="3500" dirty="0">
+                <a:solidFill>
+                  <a:srgbClr val="1F2020"/>
+                </a:solidFill>
+                <a:latin typeface="Open Sans"/>
+                <a:ea typeface="Open Sans"/>
+                <a:cs typeface="Open Sans"/>
+                <a:sym typeface="Open Sans"/>
+              </a:rPr>
+              <a:t> </a:t>
+            </a:r>
+            <a:r>
+              <a:rPr lang="en-US" sz="3500" dirty="0" err="1">
+                <a:solidFill>
+                  <a:srgbClr val="1F2020"/>
+                </a:solidFill>
+                <a:latin typeface="Open Sans"/>
+                <a:ea typeface="Open Sans"/>
+                <a:cs typeface="Open Sans"/>
+                <a:sym typeface="Open Sans"/>
+              </a:rPr>
+              <a:t>tập</a:t>
+            </a:r>
+            <a:r>
+              <a:rPr lang="en-US" sz="3500" dirty="0">
+                <a:solidFill>
+                  <a:srgbClr val="1F2020"/>
+                </a:solidFill>
+                <a:latin typeface="Open Sans"/>
+                <a:ea typeface="Open Sans"/>
+                <a:cs typeface="Open Sans"/>
+                <a:sym typeface="Open Sans"/>
+              </a:rPr>
+              <a:t> </a:t>
+            </a:r>
+            <a:r>
+              <a:rPr lang="en-US" sz="3500" dirty="0" err="1">
+                <a:solidFill>
+                  <a:srgbClr val="1F2020"/>
+                </a:solidFill>
+                <a:latin typeface="Open Sans"/>
+                <a:ea typeface="Open Sans"/>
+                <a:cs typeface="Open Sans"/>
+                <a:sym typeface="Open Sans"/>
+              </a:rPr>
+              <a:t>trung</a:t>
+            </a:r>
+            <a:r>
+              <a:rPr lang="en-US" sz="3500" dirty="0">
+                <a:solidFill>
+                  <a:srgbClr val="1F2020"/>
+                </a:solidFill>
+                <a:latin typeface="Open Sans"/>
+                <a:ea typeface="Open Sans"/>
+                <a:cs typeface="Open Sans"/>
+                <a:sym typeface="Open Sans"/>
+              </a:rPr>
+              <a:t> </a:t>
+            </a:r>
+            <a:r>
+              <a:rPr lang="en-US" sz="3500" dirty="0" err="1">
+                <a:solidFill>
+                  <a:srgbClr val="1F2020"/>
+                </a:solidFill>
+                <a:latin typeface="Open Sans"/>
+                <a:ea typeface="Open Sans"/>
+                <a:cs typeface="Open Sans"/>
+                <a:sym typeface="Open Sans"/>
+              </a:rPr>
+              <a:t>để</a:t>
+            </a:r>
+            <a:r>
+              <a:rPr lang="en-US" sz="3500" dirty="0">
+                <a:solidFill>
+                  <a:srgbClr val="1F2020"/>
+                </a:solidFill>
+                <a:latin typeface="Open Sans"/>
+                <a:ea typeface="Open Sans"/>
+                <a:cs typeface="Open Sans"/>
+                <a:sym typeface="Open Sans"/>
+              </a:rPr>
+              <a:t> </a:t>
+            </a:r>
+            <a:r>
+              <a:rPr lang="en-US" sz="3500" dirty="0" err="1">
+                <a:solidFill>
+                  <a:srgbClr val="1F2020"/>
+                </a:solidFill>
+                <a:latin typeface="Open Sans"/>
+                <a:ea typeface="Open Sans"/>
+                <a:cs typeface="Open Sans"/>
+                <a:sym typeface="Open Sans"/>
+              </a:rPr>
+              <a:t>tư</a:t>
+            </a:r>
+            <a:r>
+              <a:rPr lang="en-US" sz="3500" dirty="0">
+                <a:solidFill>
+                  <a:srgbClr val="1F2020"/>
+                </a:solidFill>
+                <a:latin typeface="Open Sans"/>
+                <a:ea typeface="Open Sans"/>
+                <a:cs typeface="Open Sans"/>
+                <a:sym typeface="Open Sans"/>
+              </a:rPr>
+              <a:t> </a:t>
+            </a:r>
+            <a:r>
+              <a:rPr lang="en-US" sz="3500" dirty="0" err="1">
+                <a:solidFill>
+                  <a:srgbClr val="1F2020"/>
+                </a:solidFill>
+                <a:latin typeface="Open Sans"/>
+                <a:ea typeface="Open Sans"/>
+                <a:cs typeface="Open Sans"/>
+                <a:sym typeface="Open Sans"/>
+              </a:rPr>
+              <a:t>vấn</a:t>
+            </a:r>
+            <a:r>
+              <a:rPr lang="en-US" sz="3500" dirty="0">
+                <a:solidFill>
+                  <a:srgbClr val="1F2020"/>
+                </a:solidFill>
+                <a:latin typeface="Open Sans"/>
+                <a:ea typeface="Open Sans"/>
+                <a:cs typeface="Open Sans"/>
+                <a:sym typeface="Open Sans"/>
+              </a:rPr>
+              <a:t> </a:t>
+            </a:r>
+            <a:r>
+              <a:rPr lang="en-US" sz="3500" dirty="0" err="1">
+                <a:solidFill>
+                  <a:srgbClr val="1F2020"/>
+                </a:solidFill>
+                <a:latin typeface="Open Sans"/>
+                <a:ea typeface="Open Sans"/>
+                <a:cs typeface="Open Sans"/>
+                <a:sym typeface="Open Sans"/>
+              </a:rPr>
+              <a:t>khách</a:t>
+            </a:r>
+            <a:r>
+              <a:rPr lang="en-US" sz="3500" dirty="0">
+                <a:solidFill>
+                  <a:srgbClr val="1F2020"/>
+                </a:solidFill>
+                <a:latin typeface="Open Sans"/>
+                <a:ea typeface="Open Sans"/>
+                <a:cs typeface="Open Sans"/>
+                <a:sym typeface="Open Sans"/>
+              </a:rPr>
+              <a:t> </a:t>
+            </a:r>
+            <a:r>
+              <a:rPr lang="en-US" sz="3500" dirty="0" err="1">
+                <a:solidFill>
+                  <a:srgbClr val="1F2020"/>
+                </a:solidFill>
+                <a:latin typeface="Open Sans"/>
+                <a:ea typeface="Open Sans"/>
+                <a:cs typeface="Open Sans"/>
+                <a:sym typeface="Open Sans"/>
+              </a:rPr>
+              <a:t>hàng</a:t>
+            </a:r>
+            <a:r>
+              <a:rPr lang="en-US" sz="3500" dirty="0">
+                <a:solidFill>
+                  <a:srgbClr val="1F2020"/>
+                </a:solidFill>
+                <a:latin typeface="Open Sans"/>
+                <a:ea typeface="Open Sans"/>
+                <a:cs typeface="Open Sans"/>
+                <a:sym typeface="Open Sans"/>
+              </a:rPr>
+              <a:t> </a:t>
+            </a:r>
+            <a:r>
+              <a:rPr lang="en-US" sz="3500" dirty="0" err="1">
+                <a:solidFill>
+                  <a:srgbClr val="1F2020"/>
+                </a:solidFill>
+                <a:latin typeface="Open Sans"/>
+                <a:ea typeface="Open Sans"/>
+                <a:cs typeface="Open Sans"/>
+                <a:sym typeface="Open Sans"/>
+              </a:rPr>
+              <a:t>chính</a:t>
+            </a:r>
+            <a:r>
+              <a:rPr lang="en-US" sz="3500" dirty="0">
+                <a:solidFill>
+                  <a:srgbClr val="1F2020"/>
+                </a:solidFill>
+                <a:latin typeface="Open Sans"/>
+                <a:ea typeface="Open Sans"/>
+                <a:cs typeface="Open Sans"/>
+                <a:sym typeface="Open Sans"/>
+              </a:rPr>
+              <a:t> </a:t>
+            </a:r>
+            <a:r>
+              <a:rPr lang="en-US" sz="3500" dirty="0" err="1">
+                <a:solidFill>
+                  <a:srgbClr val="1F2020"/>
+                </a:solidFill>
+                <a:latin typeface="Open Sans"/>
+                <a:ea typeface="Open Sans"/>
+                <a:cs typeface="Open Sans"/>
+                <a:sym typeface="Open Sans"/>
+              </a:rPr>
+              <a:t>xác</a:t>
+            </a:r>
+            <a:r>
+              <a:rPr lang="en-US" sz="3500" dirty="0">
+                <a:solidFill>
+                  <a:srgbClr val="1F2020"/>
+                </a:solidFill>
+                <a:latin typeface="Open Sans"/>
+                <a:ea typeface="Open Sans"/>
+                <a:cs typeface="Open Sans"/>
+                <a:sym typeface="Open Sans"/>
+              </a:rPr>
+              <a:t>.</a:t>
             </a:r>
           </a:p>
         </p:txBody>
@@ -28500,16 +29343,292 @@
               <a:buChar char="•"/>
             </a:pPr>
             <a:r>
-              <a:rPr lang="en-US" sz="3500">
-                <a:solidFill>
-                  <a:srgbClr val="1F2020"/>
-                </a:solidFill>
-                <a:latin typeface="Open Sans"/>
-                <a:ea typeface="Open Sans"/>
-                <a:cs typeface="Open Sans"/>
-                <a:sym typeface="Open Sans"/>
-              </a:rPr>
-              <a:t>Xây dựng một ứng dụng tập trung cho hội thoại đa kênh.</a:t>
+              <a:rPr lang="en-US" sz="3500" dirty="0" err="1">
+                <a:solidFill>
+                  <a:srgbClr val="1F2020"/>
+                </a:solidFill>
+                <a:latin typeface="Open Sans"/>
+                <a:ea typeface="Open Sans"/>
+                <a:cs typeface="Open Sans"/>
+                <a:sym typeface="Open Sans"/>
+              </a:rPr>
+              <a:t>Xây</a:t>
+            </a:r>
+            <a:r>
+              <a:rPr lang="en-US" sz="3500" dirty="0">
+                <a:solidFill>
+                  <a:srgbClr val="1F2020"/>
+                </a:solidFill>
+                <a:latin typeface="Open Sans"/>
+                <a:ea typeface="Open Sans"/>
+                <a:cs typeface="Open Sans"/>
+                <a:sym typeface="Open Sans"/>
+              </a:rPr>
+              <a:t> </a:t>
+            </a:r>
+            <a:r>
+              <a:rPr lang="en-US" sz="3500" dirty="0" err="1">
+                <a:solidFill>
+                  <a:srgbClr val="1F2020"/>
+                </a:solidFill>
+                <a:latin typeface="Open Sans"/>
+                <a:ea typeface="Open Sans"/>
+                <a:cs typeface="Open Sans"/>
+                <a:sym typeface="Open Sans"/>
+              </a:rPr>
+              <a:t>dựng</a:t>
+            </a:r>
+            <a:r>
+              <a:rPr lang="en-US" sz="3500" dirty="0">
+                <a:solidFill>
+                  <a:srgbClr val="1F2020"/>
+                </a:solidFill>
+                <a:latin typeface="Open Sans"/>
+                <a:ea typeface="Open Sans"/>
+                <a:cs typeface="Open Sans"/>
+                <a:sym typeface="Open Sans"/>
+              </a:rPr>
+              <a:t> </a:t>
+            </a:r>
+            <a:r>
+              <a:rPr lang="en-US" sz="3500" dirty="0" err="1">
+                <a:solidFill>
+                  <a:srgbClr val="1F2020"/>
+                </a:solidFill>
+                <a:latin typeface="Open Sans"/>
+                <a:ea typeface="Open Sans"/>
+                <a:cs typeface="Open Sans"/>
+                <a:sym typeface="Open Sans"/>
+              </a:rPr>
+              <a:t>một</a:t>
+            </a:r>
+            <a:r>
+              <a:rPr lang="en-US" sz="3500" dirty="0">
+                <a:solidFill>
+                  <a:srgbClr val="1F2020"/>
+                </a:solidFill>
+                <a:latin typeface="Open Sans"/>
+                <a:ea typeface="Open Sans"/>
+                <a:cs typeface="Open Sans"/>
+                <a:sym typeface="Open Sans"/>
+              </a:rPr>
+              <a:t> </a:t>
+            </a:r>
+            <a:r>
+              <a:rPr lang="en-US" sz="3500" dirty="0" err="1">
+                <a:solidFill>
+                  <a:srgbClr val="1F2020"/>
+                </a:solidFill>
+                <a:latin typeface="Open Sans"/>
+                <a:ea typeface="Open Sans"/>
+                <a:cs typeface="Open Sans"/>
+                <a:sym typeface="Open Sans"/>
+              </a:rPr>
+              <a:t>ứng</a:t>
+            </a:r>
+            <a:r>
+              <a:rPr lang="en-US" sz="3500" dirty="0">
+                <a:solidFill>
+                  <a:srgbClr val="1F2020"/>
+                </a:solidFill>
+                <a:latin typeface="Open Sans"/>
+                <a:ea typeface="Open Sans"/>
+                <a:cs typeface="Open Sans"/>
+                <a:sym typeface="Open Sans"/>
+              </a:rPr>
+              <a:t> </a:t>
+            </a:r>
+            <a:r>
+              <a:rPr lang="en-US" sz="3500" dirty="0" err="1">
+                <a:solidFill>
+                  <a:srgbClr val="1F2020"/>
+                </a:solidFill>
+                <a:latin typeface="Open Sans"/>
+                <a:ea typeface="Open Sans"/>
+                <a:cs typeface="Open Sans"/>
+                <a:sym typeface="Open Sans"/>
+              </a:rPr>
+              <a:t>dụng</a:t>
+            </a:r>
+            <a:r>
+              <a:rPr lang="en-US" sz="3500" dirty="0">
+                <a:solidFill>
+                  <a:srgbClr val="1F2020"/>
+                </a:solidFill>
+                <a:latin typeface="Open Sans"/>
+                <a:ea typeface="Open Sans"/>
+                <a:cs typeface="Open Sans"/>
+                <a:sym typeface="Open Sans"/>
+              </a:rPr>
+              <a:t> </a:t>
+            </a:r>
+            <a:r>
+              <a:rPr lang="en-US" sz="3500" dirty="0" err="1">
+                <a:solidFill>
+                  <a:srgbClr val="1F2020"/>
+                </a:solidFill>
+                <a:latin typeface="Open Sans"/>
+                <a:ea typeface="Open Sans"/>
+                <a:cs typeface="Open Sans"/>
+                <a:sym typeface="Open Sans"/>
+              </a:rPr>
+              <a:t>tập</a:t>
+            </a:r>
+            <a:r>
+              <a:rPr lang="en-US" sz="3500" dirty="0">
+                <a:solidFill>
+                  <a:srgbClr val="1F2020"/>
+                </a:solidFill>
+                <a:latin typeface="Open Sans"/>
+                <a:ea typeface="Open Sans"/>
+                <a:cs typeface="Open Sans"/>
+                <a:sym typeface="Open Sans"/>
+              </a:rPr>
+              <a:t> </a:t>
+            </a:r>
+            <a:r>
+              <a:rPr lang="en-US" sz="3500" dirty="0" err="1">
+                <a:solidFill>
+                  <a:srgbClr val="1F2020"/>
+                </a:solidFill>
+                <a:latin typeface="Open Sans"/>
+                <a:ea typeface="Open Sans"/>
+                <a:cs typeface="Open Sans"/>
+                <a:sym typeface="Open Sans"/>
+              </a:rPr>
+              <a:t>trung</a:t>
+            </a:r>
+            <a:r>
+              <a:rPr lang="en-US" sz="3500" dirty="0">
+                <a:solidFill>
+                  <a:srgbClr val="1F2020"/>
+                </a:solidFill>
+                <a:latin typeface="Open Sans"/>
+                <a:ea typeface="Open Sans"/>
+                <a:cs typeface="Open Sans"/>
+                <a:sym typeface="Open Sans"/>
+              </a:rPr>
+              <a:t> </a:t>
+            </a:r>
+            <a:r>
+              <a:rPr lang="en-US" sz="3500" dirty="0" err="1">
+                <a:solidFill>
+                  <a:srgbClr val="1F2020"/>
+                </a:solidFill>
+                <a:latin typeface="Open Sans"/>
+                <a:ea typeface="Open Sans"/>
+                <a:cs typeface="Open Sans"/>
+                <a:sym typeface="Open Sans"/>
+              </a:rPr>
+              <a:t>cho</a:t>
+            </a:r>
+            <a:r>
+              <a:rPr lang="en-US" sz="3500" dirty="0">
+                <a:solidFill>
+                  <a:srgbClr val="1F2020"/>
+                </a:solidFill>
+                <a:latin typeface="Open Sans"/>
+                <a:ea typeface="Open Sans"/>
+                <a:cs typeface="Open Sans"/>
+                <a:sym typeface="Open Sans"/>
+              </a:rPr>
+              <a:t> </a:t>
+            </a:r>
+            <a:r>
+              <a:rPr lang="en-US" sz="3500" dirty="0" err="1">
+                <a:solidFill>
+                  <a:srgbClr val="1F2020"/>
+                </a:solidFill>
+                <a:latin typeface="Open Sans"/>
+                <a:ea typeface="Open Sans"/>
+                <a:cs typeface="Open Sans"/>
+                <a:sym typeface="Open Sans"/>
+              </a:rPr>
+              <a:t>hội</a:t>
+            </a:r>
+            <a:r>
+              <a:rPr lang="en-US" sz="3500" dirty="0">
+                <a:solidFill>
+                  <a:srgbClr val="1F2020"/>
+                </a:solidFill>
+                <a:latin typeface="Open Sans"/>
+                <a:ea typeface="Open Sans"/>
+                <a:cs typeface="Open Sans"/>
+                <a:sym typeface="Open Sans"/>
+              </a:rPr>
+              <a:t> </a:t>
+            </a:r>
+            <a:r>
+              <a:rPr lang="en-US" sz="3500" dirty="0" err="1">
+                <a:solidFill>
+                  <a:srgbClr val="1F2020"/>
+                </a:solidFill>
+                <a:latin typeface="Open Sans"/>
+                <a:ea typeface="Open Sans"/>
+                <a:cs typeface="Open Sans"/>
+                <a:sym typeface="Open Sans"/>
+              </a:rPr>
+              <a:t>thoại</a:t>
+            </a:r>
+            <a:r>
+              <a:rPr lang="en-US" sz="3500" dirty="0">
+                <a:solidFill>
+                  <a:srgbClr val="1F2020"/>
+                </a:solidFill>
+                <a:latin typeface="Open Sans"/>
+                <a:ea typeface="Open Sans"/>
+                <a:cs typeface="Open Sans"/>
+                <a:sym typeface="Open Sans"/>
+              </a:rPr>
+              <a:t> </a:t>
+            </a:r>
+            <a:r>
+              <a:rPr lang="en-US" sz="3500" dirty="0" err="1">
+                <a:solidFill>
+                  <a:srgbClr val="1F2020"/>
+                </a:solidFill>
+                <a:latin typeface="Open Sans"/>
+                <a:ea typeface="Open Sans"/>
+                <a:cs typeface="Open Sans"/>
+                <a:sym typeface="Open Sans"/>
+              </a:rPr>
+              <a:t>đa</a:t>
+            </a:r>
+            <a:r>
+              <a:rPr lang="en-US" sz="3500" dirty="0">
+                <a:solidFill>
+                  <a:srgbClr val="1F2020"/>
+                </a:solidFill>
+                <a:latin typeface="Open Sans"/>
+                <a:ea typeface="Open Sans"/>
+                <a:cs typeface="Open Sans"/>
+                <a:sym typeface="Open Sans"/>
+              </a:rPr>
+              <a:t> </a:t>
+            </a:r>
+            <a:r>
+              <a:rPr lang="en-US" sz="3500" dirty="0" err="1">
+                <a:solidFill>
+                  <a:srgbClr val="1F2020"/>
+                </a:solidFill>
+                <a:latin typeface="Open Sans"/>
+                <a:ea typeface="Open Sans"/>
+                <a:cs typeface="Open Sans"/>
+                <a:sym typeface="Open Sans"/>
+              </a:rPr>
+              <a:t>kênh</a:t>
+            </a:r>
+            <a:r>
+              <a:rPr lang="en-US" sz="3500" dirty="0">
+                <a:solidFill>
+                  <a:srgbClr val="1F2020"/>
+                </a:solidFill>
+                <a:latin typeface="Open Sans"/>
+                <a:ea typeface="Open Sans"/>
+                <a:cs typeface="Open Sans"/>
+                <a:sym typeface="Open Sans"/>
+              </a:rPr>
+              <a:t>.</a:t>
             </a:r>
           </a:p>
           <a:p>
@@ -28521,16 +29640,508 @@
               <a:buChar char="•"/>
             </a:pPr>
             <a:r>
-              <a:rPr lang="en-US" sz="3500">
-                <a:solidFill>
-                  <a:srgbClr val="1F2020"/>
-                </a:solidFill>
-                <a:latin typeface="Open Sans"/>
-                <a:ea typeface="Open Sans"/>
-                <a:cs typeface="Open Sans"/>
-                <a:sym typeface="Open Sans"/>
-              </a:rPr>
-              <a:t>Tích hợp AI tự động trả lời dựa trên sản phẩm, chính sách và lịch sử hội thoại của từng doanh nghiệp.</a:t>
+              <a:rPr lang="en-US" sz="3500" dirty="0" err="1">
+                <a:solidFill>
+                  <a:srgbClr val="1F2020"/>
+                </a:solidFill>
+                <a:latin typeface="Open Sans"/>
+                <a:ea typeface="Open Sans"/>
+                <a:cs typeface="Open Sans"/>
+                <a:sym typeface="Open Sans"/>
+              </a:rPr>
+              <a:t>Tích</a:t>
+            </a:r>
+            <a:r>
+              <a:rPr lang="en-US" sz="3500" dirty="0">
+                <a:solidFill>
+                  <a:srgbClr val="1F2020"/>
+                </a:solidFill>
+                <a:latin typeface="Open Sans"/>
+                <a:ea typeface="Open Sans"/>
+                <a:cs typeface="Open Sans"/>
+                <a:sym typeface="Open Sans"/>
+              </a:rPr>
+              <a:t> </a:t>
+            </a:r>
+            <a:r>
+              <a:rPr lang="en-US" sz="3500" dirty="0" err="1">
+                <a:solidFill>
+                  <a:srgbClr val="1F2020"/>
+                </a:solidFill>
+                <a:latin typeface="Open Sans"/>
+                <a:ea typeface="Open Sans"/>
+                <a:cs typeface="Open Sans"/>
+                <a:sym typeface="Open Sans"/>
+              </a:rPr>
+              <a:t>hợp</a:t>
+            </a:r>
+            <a:r>
+              <a:rPr lang="en-US" sz="3500" dirty="0">
+                <a:solidFill>
+                  <a:srgbClr val="1F2020"/>
+                </a:solidFill>
+                <a:latin typeface="Open Sans"/>
+                <a:ea typeface="Open Sans"/>
+                <a:cs typeface="Open Sans"/>
+                <a:sym typeface="Open Sans"/>
+              </a:rPr>
+              <a:t> AI </a:t>
+            </a:r>
+            <a:r>
+              <a:rPr lang="en-US" sz="3500" dirty="0" err="1">
+                <a:solidFill>
+                  <a:srgbClr val="1F2020"/>
+                </a:solidFill>
+                <a:latin typeface="Open Sans"/>
+                <a:ea typeface="Open Sans"/>
+                <a:cs typeface="Open Sans"/>
+                <a:sym typeface="Open Sans"/>
+              </a:rPr>
+              <a:t>tự</a:t>
+            </a:r>
+            <a:r>
+              <a:rPr lang="en-US" sz="3500" dirty="0">
+                <a:solidFill>
+                  <a:srgbClr val="1F2020"/>
+                </a:solidFill>
+                <a:latin typeface="Open Sans"/>
+                <a:ea typeface="Open Sans"/>
+                <a:cs typeface="Open Sans"/>
+                <a:sym typeface="Open Sans"/>
+              </a:rPr>
+              <a:t> </a:t>
+            </a:r>
+            <a:r>
+              <a:rPr lang="en-US" sz="3500" dirty="0" err="1">
+                <a:solidFill>
+                  <a:srgbClr val="1F2020"/>
+                </a:solidFill>
+                <a:latin typeface="Open Sans"/>
+                <a:ea typeface="Open Sans"/>
+                <a:cs typeface="Open Sans"/>
+                <a:sym typeface="Open Sans"/>
+              </a:rPr>
+              <a:t>động</a:t>
+            </a:r>
+            <a:r>
+              <a:rPr lang="en-US" sz="3500" dirty="0">
+                <a:solidFill>
+                  <a:srgbClr val="1F2020"/>
+                </a:solidFill>
+                <a:latin typeface="Open Sans"/>
+                <a:ea typeface="Open Sans"/>
+                <a:cs typeface="Open Sans"/>
+                <a:sym typeface="Open Sans"/>
+              </a:rPr>
+              <a:t> </a:t>
+            </a:r>
+            <a:r>
+              <a:rPr lang="en-US" sz="3500" dirty="0" err="1">
+                <a:solidFill>
+                  <a:srgbClr val="1F2020"/>
+                </a:solidFill>
+                <a:latin typeface="Open Sans"/>
+                <a:ea typeface="Open Sans"/>
+                <a:cs typeface="Open Sans"/>
+                <a:sym typeface="Open Sans"/>
+              </a:rPr>
+              <a:t>trả</a:t>
+            </a:r>
+            <a:r>
+              <a:rPr lang="en-US" sz="3500" dirty="0">
+                <a:solidFill>
+                  <a:srgbClr val="1F2020"/>
+                </a:solidFill>
+                <a:latin typeface="Open Sans"/>
+                <a:ea typeface="Open Sans"/>
+                <a:cs typeface="Open Sans"/>
+                <a:sym typeface="Open Sans"/>
+              </a:rPr>
+              <a:t> </a:t>
+            </a:r>
+            <a:r>
+              <a:rPr lang="en-US" sz="3500" dirty="0" err="1">
+                <a:solidFill>
+                  <a:srgbClr val="1F2020"/>
+                </a:solidFill>
+                <a:latin typeface="Open Sans"/>
+                <a:ea typeface="Open Sans"/>
+                <a:cs typeface="Open Sans"/>
+                <a:sym typeface="Open Sans"/>
+              </a:rPr>
+              <a:t>lời</a:t>
+            </a:r>
+            <a:r>
+              <a:rPr lang="en-US" sz="3500" dirty="0">
+                <a:solidFill>
+                  <a:srgbClr val="1F2020"/>
+                </a:solidFill>
+                <a:latin typeface="Open Sans"/>
+                <a:ea typeface="Open Sans"/>
+                <a:cs typeface="Open Sans"/>
+                <a:sym typeface="Open Sans"/>
+              </a:rPr>
+              <a:t> </a:t>
+            </a:r>
+            <a:r>
+              <a:rPr lang="en-US" sz="3500" dirty="0" err="1">
+                <a:solidFill>
+                  <a:srgbClr val="1F2020"/>
+                </a:solidFill>
+                <a:latin typeface="Open Sans"/>
+                <a:ea typeface="Open Sans"/>
+                <a:cs typeface="Open Sans"/>
+                <a:sym typeface="Open Sans"/>
+              </a:rPr>
+              <a:t>dựa</a:t>
+            </a:r>
+            <a:r>
+              <a:rPr lang="en-US" sz="3500" dirty="0">
+                <a:solidFill>
+                  <a:srgbClr val="1F2020"/>
+                </a:solidFill>
+                <a:latin typeface="Open Sans"/>
+                <a:ea typeface="Open Sans"/>
+                <a:cs typeface="Open Sans"/>
+                <a:sym typeface="Open Sans"/>
+              </a:rPr>
+              <a:t> </a:t>
+            </a:r>
+            <a:r>
+              <a:rPr lang="en-US" sz="3500" dirty="0" err="1">
+                <a:solidFill>
+                  <a:srgbClr val="1F2020"/>
+                </a:solidFill>
+                <a:latin typeface="Open Sans"/>
+                <a:ea typeface="Open Sans"/>
+                <a:cs typeface="Open Sans"/>
+                <a:sym typeface="Open Sans"/>
+              </a:rPr>
+              <a:t>trên</a:t>
+            </a:r>
+            <a:r>
+              <a:rPr lang="en-US" sz="3500" dirty="0">
+                <a:solidFill>
+                  <a:srgbClr val="1F2020"/>
+                </a:solidFill>
+                <a:latin typeface="Open Sans"/>
+                <a:ea typeface="Open Sans"/>
+                <a:cs typeface="Open Sans"/>
+                <a:sym typeface="Open Sans"/>
+              </a:rPr>
+              <a:t> </a:t>
+            </a:r>
+            <a:r>
+              <a:rPr lang="en-US" sz="3500" dirty="0" err="1">
+                <a:solidFill>
+                  <a:srgbClr val="1F2020"/>
+                </a:solidFill>
+                <a:latin typeface="Open Sans"/>
+                <a:ea typeface="Open Sans"/>
+                <a:cs typeface="Open Sans"/>
+                <a:sym typeface="Open Sans"/>
+              </a:rPr>
+              <a:t>sản</a:t>
+            </a:r>
+            <a:r>
+              <a:rPr lang="en-US" sz="3500" dirty="0">
+                <a:solidFill>
+                  <a:srgbClr val="1F2020"/>
+                </a:solidFill>
+                <a:latin typeface="Open Sans"/>
+                <a:ea typeface="Open Sans"/>
+                <a:cs typeface="Open Sans"/>
+                <a:sym typeface="Open Sans"/>
+              </a:rPr>
+              <a:t> </a:t>
+            </a:r>
+            <a:r>
+              <a:rPr lang="en-US" sz="3500" dirty="0" err="1">
+                <a:solidFill>
+                  <a:srgbClr val="1F2020"/>
+                </a:solidFill>
+                <a:latin typeface="Open Sans"/>
+                <a:ea typeface="Open Sans"/>
+                <a:cs typeface="Open Sans"/>
+                <a:sym typeface="Open Sans"/>
+              </a:rPr>
+              <a:t>phẩm</a:t>
+            </a:r>
+            <a:r>
+              <a:rPr lang="en-US" sz="3500" dirty="0">
+                <a:solidFill>
+                  <a:srgbClr val="1F2020"/>
+                </a:solidFill>
+                <a:latin typeface="Open Sans"/>
+                <a:ea typeface="Open Sans"/>
+                <a:cs typeface="Open Sans"/>
+                <a:sym typeface="Open Sans"/>
+              </a:rPr>
+              <a:t>, </a:t>
+            </a:r>
+            <a:r>
+              <a:rPr lang="en-US" sz="3500" dirty="0" err="1">
+                <a:solidFill>
+                  <a:srgbClr val="1F2020"/>
+                </a:solidFill>
+                <a:latin typeface="Open Sans"/>
+                <a:ea typeface="Open Sans"/>
+                <a:cs typeface="Open Sans"/>
+                <a:sym typeface="Open Sans"/>
+              </a:rPr>
+              <a:t>chính</a:t>
+            </a:r>
+            <a:r>
+              <a:rPr lang="en-US" sz="3500" dirty="0">
+                <a:solidFill>
+                  <a:srgbClr val="1F2020"/>
+                </a:solidFill>
+                <a:latin typeface="Open Sans"/>
+                <a:ea typeface="Open Sans"/>
+                <a:cs typeface="Open Sans"/>
+                <a:sym typeface="Open Sans"/>
+              </a:rPr>
+              <a:t> </a:t>
+            </a:r>
+            <a:r>
+              <a:rPr lang="en-US" sz="3500" dirty="0" err="1">
+                <a:solidFill>
+                  <a:srgbClr val="1F2020"/>
+                </a:solidFill>
+                <a:latin typeface="Open Sans"/>
+                <a:ea typeface="Open Sans"/>
+                <a:cs typeface="Open Sans"/>
+                <a:sym typeface="Open Sans"/>
+              </a:rPr>
+              <a:t>sách</a:t>
+            </a:r>
+            <a:r>
+              <a:rPr lang="en-US" sz="3500" dirty="0">
+                <a:solidFill>
+                  <a:srgbClr val="1F2020"/>
+                </a:solidFill>
+                <a:latin typeface="Open Sans"/>
+                <a:ea typeface="Open Sans"/>
+                <a:cs typeface="Open Sans"/>
+                <a:sym typeface="Open Sans"/>
+              </a:rPr>
+              <a:t> </a:t>
+            </a:r>
+            <a:r>
+              <a:rPr lang="en-US" sz="3500" dirty="0" err="1">
+                <a:solidFill>
+                  <a:srgbClr val="1F2020"/>
+                </a:solidFill>
+                <a:latin typeface="Open Sans"/>
+                <a:ea typeface="Open Sans"/>
+                <a:cs typeface="Open Sans"/>
+                <a:sym typeface="Open Sans"/>
+              </a:rPr>
+              <a:t>và</a:t>
+            </a:r>
+            <a:r>
+              <a:rPr lang="en-US" sz="3500" dirty="0">
+                <a:solidFill>
+                  <a:srgbClr val="1F2020"/>
+                </a:solidFill>
+                <a:latin typeface="Open Sans"/>
+                <a:ea typeface="Open Sans"/>
+                <a:cs typeface="Open Sans"/>
+                <a:sym typeface="Open Sans"/>
+              </a:rPr>
+              <a:t> </a:t>
+            </a:r>
+            <a:r>
+              <a:rPr lang="en-US" sz="3500" dirty="0" err="1">
+                <a:solidFill>
+                  <a:srgbClr val="1F2020"/>
+                </a:solidFill>
+                <a:latin typeface="Open Sans"/>
+                <a:ea typeface="Open Sans"/>
+                <a:cs typeface="Open Sans"/>
+                <a:sym typeface="Open Sans"/>
+              </a:rPr>
+              <a:t>lịch</a:t>
+            </a:r>
+            <a:r>
+              <a:rPr lang="en-US" sz="3500" dirty="0">
+                <a:solidFill>
+                  <a:srgbClr val="1F2020"/>
+                </a:solidFill>
+                <a:latin typeface="Open Sans"/>
+                <a:ea typeface="Open Sans"/>
+                <a:cs typeface="Open Sans"/>
+                <a:sym typeface="Open Sans"/>
+              </a:rPr>
+              <a:t> </a:t>
+            </a:r>
+            <a:r>
+              <a:rPr lang="en-US" sz="3500" dirty="0" err="1">
+                <a:solidFill>
+                  <a:srgbClr val="1F2020"/>
+                </a:solidFill>
+                <a:latin typeface="Open Sans"/>
+                <a:ea typeface="Open Sans"/>
+                <a:cs typeface="Open Sans"/>
+                <a:sym typeface="Open Sans"/>
+              </a:rPr>
+              <a:t>sử</a:t>
+            </a:r>
+            <a:r>
+              <a:rPr lang="en-US" sz="3500" dirty="0">
+                <a:solidFill>
+                  <a:srgbClr val="1F2020"/>
+                </a:solidFill>
+                <a:latin typeface="Open Sans"/>
+                <a:ea typeface="Open Sans"/>
+                <a:cs typeface="Open Sans"/>
+                <a:sym typeface="Open Sans"/>
+              </a:rPr>
+              <a:t> </a:t>
+            </a:r>
+            <a:r>
+              <a:rPr lang="en-US" sz="3500" dirty="0" err="1">
+                <a:solidFill>
+                  <a:srgbClr val="1F2020"/>
+                </a:solidFill>
+                <a:latin typeface="Open Sans"/>
+                <a:ea typeface="Open Sans"/>
+                <a:cs typeface="Open Sans"/>
+                <a:sym typeface="Open Sans"/>
+              </a:rPr>
+              <a:t>hội</a:t>
+            </a:r>
+            <a:r>
+              <a:rPr lang="en-US" sz="3500" dirty="0">
+                <a:solidFill>
+                  <a:srgbClr val="1F2020"/>
+                </a:solidFill>
+                <a:latin typeface="Open Sans"/>
+                <a:ea typeface="Open Sans"/>
+                <a:cs typeface="Open Sans"/>
+                <a:sym typeface="Open Sans"/>
+              </a:rPr>
+              <a:t> </a:t>
+            </a:r>
+            <a:r>
+              <a:rPr lang="en-US" sz="3500" dirty="0" err="1">
+                <a:solidFill>
+                  <a:srgbClr val="1F2020"/>
+                </a:solidFill>
+                <a:latin typeface="Open Sans"/>
+                <a:ea typeface="Open Sans"/>
+                <a:cs typeface="Open Sans"/>
+                <a:sym typeface="Open Sans"/>
+              </a:rPr>
+              <a:t>thoại</a:t>
+            </a:r>
+            <a:r>
+              <a:rPr lang="en-US" sz="3500" dirty="0">
+                <a:solidFill>
+                  <a:srgbClr val="1F2020"/>
+                </a:solidFill>
+                <a:latin typeface="Open Sans"/>
+                <a:ea typeface="Open Sans"/>
+                <a:cs typeface="Open Sans"/>
+                <a:sym typeface="Open Sans"/>
+              </a:rPr>
+              <a:t> </a:t>
+            </a:r>
+            <a:r>
+              <a:rPr lang="en-US" sz="3500" dirty="0" err="1">
+                <a:solidFill>
+                  <a:srgbClr val="1F2020"/>
+                </a:solidFill>
+                <a:latin typeface="Open Sans"/>
+                <a:ea typeface="Open Sans"/>
+                <a:cs typeface="Open Sans"/>
+                <a:sym typeface="Open Sans"/>
+              </a:rPr>
+              <a:t>của</a:t>
+            </a:r>
+            <a:r>
+              <a:rPr lang="en-US" sz="3500" dirty="0">
+                <a:solidFill>
+                  <a:srgbClr val="1F2020"/>
+                </a:solidFill>
+                <a:latin typeface="Open Sans"/>
+                <a:ea typeface="Open Sans"/>
+                <a:cs typeface="Open Sans"/>
+                <a:sym typeface="Open Sans"/>
+              </a:rPr>
+              <a:t> </a:t>
+            </a:r>
+            <a:r>
+              <a:rPr lang="en-US" sz="3500" dirty="0" err="1">
+                <a:solidFill>
+                  <a:srgbClr val="1F2020"/>
+                </a:solidFill>
+                <a:latin typeface="Open Sans"/>
+                <a:ea typeface="Open Sans"/>
+                <a:cs typeface="Open Sans"/>
+                <a:sym typeface="Open Sans"/>
+              </a:rPr>
+              <a:t>từng</a:t>
+            </a:r>
+            <a:r>
+              <a:rPr lang="en-US" sz="3500" dirty="0">
+                <a:solidFill>
+                  <a:srgbClr val="1F2020"/>
+                </a:solidFill>
+                <a:latin typeface="Open Sans"/>
+                <a:ea typeface="Open Sans"/>
+                <a:cs typeface="Open Sans"/>
+                <a:sym typeface="Open Sans"/>
+              </a:rPr>
+              <a:t> </a:t>
+            </a:r>
+            <a:r>
+              <a:rPr lang="en-US" sz="3500" dirty="0" err="1">
+                <a:solidFill>
+                  <a:srgbClr val="1F2020"/>
+                </a:solidFill>
+                <a:latin typeface="Open Sans"/>
+                <a:ea typeface="Open Sans"/>
+                <a:cs typeface="Open Sans"/>
+                <a:sym typeface="Open Sans"/>
+              </a:rPr>
+              <a:t>doanh</a:t>
+            </a:r>
+            <a:r>
+              <a:rPr lang="en-US" sz="3500" dirty="0">
+                <a:solidFill>
+                  <a:srgbClr val="1F2020"/>
+                </a:solidFill>
+                <a:latin typeface="Open Sans"/>
+                <a:ea typeface="Open Sans"/>
+                <a:cs typeface="Open Sans"/>
+                <a:sym typeface="Open Sans"/>
+              </a:rPr>
+              <a:t> </a:t>
+            </a:r>
+            <a:r>
+              <a:rPr lang="en-US" sz="3500" dirty="0" err="1">
+                <a:solidFill>
+                  <a:srgbClr val="1F2020"/>
+                </a:solidFill>
+                <a:latin typeface="Open Sans"/>
+                <a:ea typeface="Open Sans"/>
+                <a:cs typeface="Open Sans"/>
+                <a:sym typeface="Open Sans"/>
+              </a:rPr>
+              <a:t>nghiệp</a:t>
+            </a:r>
+            <a:r>
+              <a:rPr lang="en-US" sz="3500" dirty="0">
+                <a:solidFill>
+                  <a:srgbClr val="1F2020"/>
+                </a:solidFill>
+                <a:latin typeface="Open Sans"/>
+                <a:ea typeface="Open Sans"/>
+                <a:cs typeface="Open Sans"/>
+                <a:sym typeface="Open Sans"/>
+              </a:rPr>
+              <a:t>.</a:t>
             </a:r>
           </a:p>
           <a:p>
@@ -28545,16 +30156,376 @@
               <a:buChar char="•"/>
             </a:pPr>
             <a:r>
-              <a:rPr lang="en-US" sz="3500">
-                <a:solidFill>
-                  <a:srgbClr val="1F2020"/>
-                </a:solidFill>
-                <a:latin typeface="Open Sans"/>
-                <a:ea typeface="Open Sans"/>
-                <a:cs typeface="Open Sans"/>
-                <a:sym typeface="Open Sans"/>
-              </a:rPr>
-              <a:t>AI cũng gợi ý phản hồi, tóm tắt nội dung trao đổi và hỗ trợ ra quyết định.</a:t>
+              <a:rPr lang="en-US" sz="3500" dirty="0">
+                <a:solidFill>
+                  <a:srgbClr val="1F2020"/>
+                </a:solidFill>
+                <a:latin typeface="Open Sans"/>
+                <a:ea typeface="Open Sans"/>
+                <a:cs typeface="Open Sans"/>
+                <a:sym typeface="Open Sans"/>
+              </a:rPr>
+              <a:t>AI </a:t>
+            </a:r>
+            <a:r>
+              <a:rPr lang="en-US" sz="3500" dirty="0" err="1">
+                <a:solidFill>
+                  <a:srgbClr val="1F2020"/>
+                </a:solidFill>
+                <a:latin typeface="Open Sans"/>
+                <a:ea typeface="Open Sans"/>
+                <a:cs typeface="Open Sans"/>
+                <a:sym typeface="Open Sans"/>
+              </a:rPr>
+              <a:t>cũng</a:t>
+            </a:r>
+            <a:r>
+              <a:rPr lang="en-US" sz="3500" dirty="0">
+                <a:solidFill>
+                  <a:srgbClr val="1F2020"/>
+                </a:solidFill>
+                <a:latin typeface="Open Sans"/>
+                <a:ea typeface="Open Sans"/>
+                <a:cs typeface="Open Sans"/>
+                <a:sym typeface="Open Sans"/>
+              </a:rPr>
+              <a:t> </a:t>
+            </a:r>
+            <a:r>
+              <a:rPr lang="en-US" sz="3500" dirty="0" err="1">
+                <a:solidFill>
+                  <a:srgbClr val="1F2020"/>
+                </a:solidFill>
+                <a:latin typeface="Open Sans"/>
+                <a:ea typeface="Open Sans"/>
+                <a:cs typeface="Open Sans"/>
+                <a:sym typeface="Open Sans"/>
+              </a:rPr>
+              <a:t>gợi</a:t>
+            </a:r>
+            <a:r>
+              <a:rPr lang="en-US" sz="3500" dirty="0">
+                <a:solidFill>
+                  <a:srgbClr val="1F2020"/>
+                </a:solidFill>
+                <a:latin typeface="Open Sans"/>
+                <a:ea typeface="Open Sans"/>
+                <a:cs typeface="Open Sans"/>
+                <a:sym typeface="Open Sans"/>
+              </a:rPr>
+              <a:t> ý </a:t>
+            </a:r>
+            <a:r>
+              <a:rPr lang="en-US" sz="3500" dirty="0" err="1">
+                <a:solidFill>
+                  <a:srgbClr val="1F2020"/>
+                </a:solidFill>
+                <a:latin typeface="Open Sans"/>
+                <a:ea typeface="Open Sans"/>
+                <a:cs typeface="Open Sans"/>
+                <a:sym typeface="Open Sans"/>
+              </a:rPr>
+              <a:t>phản</a:t>
+            </a:r>
+            <a:r>
+              <a:rPr lang="en-US" sz="3500" dirty="0">
+                <a:solidFill>
+                  <a:srgbClr val="1F2020"/>
+                </a:solidFill>
+                <a:latin typeface="Open Sans"/>
+                <a:ea typeface="Open Sans"/>
+                <a:cs typeface="Open Sans"/>
+                <a:sym typeface="Open Sans"/>
+              </a:rPr>
+              <a:t> </a:t>
+            </a:r>
+            <a:r>
+              <a:rPr lang="en-US" sz="3500" dirty="0" err="1">
+                <a:solidFill>
+                  <a:srgbClr val="1F2020"/>
+                </a:solidFill>
+                <a:latin typeface="Open Sans"/>
+                <a:ea typeface="Open Sans"/>
+                <a:cs typeface="Open Sans"/>
+                <a:sym typeface="Open Sans"/>
+              </a:rPr>
+              <a:t>hồi</a:t>
+            </a:r>
+            <a:r>
+              <a:rPr lang="en-US" sz="3500" dirty="0">
+                <a:solidFill>
+                  <a:srgbClr val="1F2020"/>
+                </a:solidFill>
+                <a:latin typeface="Open Sans"/>
+                <a:ea typeface="Open Sans"/>
+                <a:cs typeface="Open Sans"/>
+                <a:sym typeface="Open Sans"/>
+              </a:rPr>
+              <a:t>, </a:t>
+            </a:r>
+            <a:r>
+              <a:rPr lang="en-US" sz="3500" dirty="0" err="1">
+                <a:solidFill>
+                  <a:srgbClr val="1F2020"/>
+                </a:solidFill>
+                <a:latin typeface="Open Sans"/>
+                <a:ea typeface="Open Sans"/>
+                <a:cs typeface="Open Sans"/>
+                <a:sym typeface="Open Sans"/>
+              </a:rPr>
+              <a:t>tóm</a:t>
+            </a:r>
+            <a:r>
+              <a:rPr lang="en-US" sz="3500" dirty="0">
+                <a:solidFill>
+                  <a:srgbClr val="1F2020"/>
+                </a:solidFill>
+                <a:latin typeface="Open Sans"/>
+                <a:ea typeface="Open Sans"/>
+                <a:cs typeface="Open Sans"/>
+                <a:sym typeface="Open Sans"/>
+              </a:rPr>
+              <a:t> </a:t>
+            </a:r>
+            <a:r>
+              <a:rPr lang="en-US" sz="3500" dirty="0" err="1">
+                <a:solidFill>
+                  <a:srgbClr val="1F2020"/>
+                </a:solidFill>
+                <a:latin typeface="Open Sans"/>
+                <a:ea typeface="Open Sans"/>
+                <a:cs typeface="Open Sans"/>
+                <a:sym typeface="Open Sans"/>
+              </a:rPr>
+              <a:t>tắt</a:t>
+            </a:r>
+            <a:r>
+              <a:rPr lang="en-US" sz="3500" dirty="0">
+                <a:solidFill>
+                  <a:srgbClr val="1F2020"/>
+                </a:solidFill>
+                <a:latin typeface="Open Sans"/>
+                <a:ea typeface="Open Sans"/>
+                <a:cs typeface="Open Sans"/>
+                <a:sym typeface="Open Sans"/>
+              </a:rPr>
+              <a:t> </a:t>
+            </a:r>
+            <a:r>
+              <a:rPr lang="en-US" sz="3500" dirty="0" err="1">
+                <a:solidFill>
+                  <a:srgbClr val="1F2020"/>
+                </a:solidFill>
+                <a:latin typeface="Open Sans"/>
+                <a:ea typeface="Open Sans"/>
+                <a:cs typeface="Open Sans"/>
+                <a:sym typeface="Open Sans"/>
+              </a:rPr>
+              <a:t>nội</a:t>
+            </a:r>
+            <a:r>
+              <a:rPr lang="en-US" sz="3500" dirty="0">
+                <a:solidFill>
+                  <a:srgbClr val="1F2020"/>
+                </a:solidFill>
+                <a:latin typeface="Open Sans"/>
+                <a:ea typeface="Open Sans"/>
+                <a:cs typeface="Open Sans"/>
+                <a:sym typeface="Open Sans"/>
+              </a:rPr>
+              <a:t> dung </a:t>
+            </a:r>
+            <a:r>
+              <a:rPr lang="en-US" sz="3500" dirty="0" err="1">
+                <a:solidFill>
+                  <a:srgbClr val="1F2020"/>
+                </a:solidFill>
+                <a:latin typeface="Open Sans"/>
+                <a:ea typeface="Open Sans"/>
+                <a:cs typeface="Open Sans"/>
+                <a:sym typeface="Open Sans"/>
+              </a:rPr>
+              <a:t>trao</a:t>
+            </a:r>
+            <a:r>
+              <a:rPr lang="en-US" sz="3500" dirty="0">
+                <a:solidFill>
+                  <a:srgbClr val="1F2020"/>
+                </a:solidFill>
+                <a:latin typeface="Open Sans"/>
+                <a:ea typeface="Open Sans"/>
+                <a:cs typeface="Open Sans"/>
+                <a:sym typeface="Open Sans"/>
+              </a:rPr>
+              <a:t> </a:t>
+            </a:r>
+            <a:r>
+              <a:rPr lang="en-US" sz="3500" dirty="0" err="1">
+                <a:solidFill>
+                  <a:srgbClr val="1F2020"/>
+                </a:solidFill>
+                <a:latin typeface="Open Sans"/>
+                <a:ea typeface="Open Sans"/>
+                <a:cs typeface="Open Sans"/>
+                <a:sym typeface="Open Sans"/>
+              </a:rPr>
+              <a:t>đổi</a:t>
+            </a:r>
+            <a:r>
+              <a:rPr lang="en-US" sz="3500" dirty="0">
+                <a:solidFill>
+                  <a:srgbClr val="1F2020"/>
+                </a:solidFill>
+                <a:latin typeface="Open Sans"/>
+                <a:ea typeface="Open Sans"/>
+                <a:cs typeface="Open Sans"/>
+                <a:sym typeface="Open Sans"/>
+              </a:rPr>
+              <a:t> </a:t>
+            </a:r>
+            <a:r>
+              <a:rPr lang="en-US" sz="3500" dirty="0" err="1">
+                <a:solidFill>
+                  <a:srgbClr val="1F2020"/>
+                </a:solidFill>
+                <a:latin typeface="Open Sans"/>
+                <a:ea typeface="Open Sans"/>
+                <a:cs typeface="Open Sans"/>
+                <a:sym typeface="Open Sans"/>
+              </a:rPr>
+              <a:t>và</a:t>
+            </a:r>
+            <a:r>
+              <a:rPr lang="en-US" sz="3500" dirty="0">
+                <a:solidFill>
+                  <a:srgbClr val="1F2020"/>
+                </a:solidFill>
+                <a:latin typeface="Open Sans"/>
+                <a:ea typeface="Open Sans"/>
+                <a:cs typeface="Open Sans"/>
+                <a:sym typeface="Open Sans"/>
+              </a:rPr>
+              <a:t> </a:t>
+            </a:r>
+            <a:r>
+              <a:rPr lang="en-US" sz="3500" dirty="0" err="1">
+                <a:solidFill>
+                  <a:srgbClr val="1F2020"/>
+                </a:solidFill>
+                <a:latin typeface="Open Sans"/>
+                <a:ea typeface="Open Sans"/>
+                <a:cs typeface="Open Sans"/>
+                <a:sym typeface="Open Sans"/>
+              </a:rPr>
+              <a:t>hỗ</a:t>
+            </a:r>
+            <a:r>
+              <a:rPr lang="en-US" sz="3500" dirty="0">
+                <a:solidFill>
+                  <a:srgbClr val="1F2020"/>
+                </a:solidFill>
+                <a:latin typeface="Open Sans"/>
+                <a:ea typeface="Open Sans"/>
+                <a:cs typeface="Open Sans"/>
+                <a:sym typeface="Open Sans"/>
+              </a:rPr>
+              <a:t> </a:t>
+            </a:r>
+            <a:r>
+              <a:rPr lang="en-US" sz="3500" dirty="0" err="1">
+                <a:solidFill>
+                  <a:srgbClr val="1F2020"/>
+                </a:solidFill>
+                <a:latin typeface="Open Sans"/>
+                <a:ea typeface="Open Sans"/>
+                <a:cs typeface="Open Sans"/>
+                <a:sym typeface="Open Sans"/>
+              </a:rPr>
+              <a:t>trợ</a:t>
+            </a:r>
+            <a:r>
+              <a:rPr lang="en-US" sz="3500" dirty="0">
+                <a:solidFill>
+                  <a:srgbClr val="1F2020"/>
+                </a:solidFill>
+                <a:latin typeface="Open Sans"/>
+                <a:ea typeface="Open Sans"/>
+                <a:cs typeface="Open Sans"/>
+                <a:sym typeface="Open Sans"/>
+              </a:rPr>
+              <a:t> </a:t>
+            </a:r>
+            <a:r>
+              <a:rPr lang="en-US" sz="3500" dirty="0" err="1">
+                <a:solidFill>
+                  <a:srgbClr val="1F2020"/>
+                </a:solidFill>
+                <a:latin typeface="Open Sans"/>
+                <a:ea typeface="Open Sans"/>
+                <a:cs typeface="Open Sans"/>
+                <a:sym typeface="Open Sans"/>
+              </a:rPr>
+              <a:t>ra</a:t>
+            </a:r>
+            <a:r>
+              <a:rPr lang="en-US" sz="3500" dirty="0">
+                <a:solidFill>
+                  <a:srgbClr val="1F2020"/>
+                </a:solidFill>
+                <a:latin typeface="Open Sans"/>
+                <a:ea typeface="Open Sans"/>
+                <a:cs typeface="Open Sans"/>
+                <a:sym typeface="Open Sans"/>
+              </a:rPr>
+              <a:t> </a:t>
+            </a:r>
+            <a:r>
+              <a:rPr lang="en-US" sz="3500" dirty="0" err="1">
+                <a:solidFill>
+                  <a:srgbClr val="1F2020"/>
+                </a:solidFill>
+                <a:latin typeface="Open Sans"/>
+                <a:ea typeface="Open Sans"/>
+                <a:cs typeface="Open Sans"/>
+                <a:sym typeface="Open Sans"/>
+              </a:rPr>
+              <a:t>quyết</a:t>
+            </a:r>
+            <a:r>
+              <a:rPr lang="en-US" sz="3500" dirty="0">
+                <a:solidFill>
+                  <a:srgbClr val="1F2020"/>
+                </a:solidFill>
+                <a:latin typeface="Open Sans"/>
+                <a:ea typeface="Open Sans"/>
+                <a:cs typeface="Open Sans"/>
+                <a:sym typeface="Open Sans"/>
+              </a:rPr>
+              <a:t> </a:t>
+            </a:r>
+            <a:r>
+              <a:rPr lang="en-US" sz="3500" dirty="0" err="1">
+                <a:solidFill>
+                  <a:srgbClr val="1F2020"/>
+                </a:solidFill>
+                <a:latin typeface="Open Sans"/>
+                <a:ea typeface="Open Sans"/>
+                <a:cs typeface="Open Sans"/>
+                <a:sym typeface="Open Sans"/>
+              </a:rPr>
+              <a:t>định</a:t>
+            </a:r>
+            <a:r>
+              <a:rPr lang="en-US" sz="3500" dirty="0">
+                <a:solidFill>
+                  <a:srgbClr val="1F2020"/>
+                </a:solidFill>
+                <a:latin typeface="Open Sans"/>
+                <a:ea typeface="Open Sans"/>
+                <a:cs typeface="Open Sans"/>
+                <a:sym typeface="Open Sans"/>
+              </a:rPr>
+              <a:t>.</a:t>
             </a:r>
           </a:p>
         </p:txBody>
@@ -28564,13 +30535,13 @@
   <p:clrMapOvr>
     <a:masterClrMapping/>
   </p:clrMapOvr>
-  <mc:AlternateContent xmlns:mc="http://schemas.openxmlformats.org/markup-compatibility/2006">
-    <mc:Choice xmlns:p159="http://schemas.microsoft.com/office/powerpoint/2015/09/main" Requires="p159">
+  <mc:AlternateContent xmlns:mc="http://schemas.openxmlformats.org/markup-compatibility/2006" xmlns:p159="http://schemas.microsoft.com/office/powerpoint/2015/09/main">
+    <mc:Choice Requires="p159">
       <p:transition xmlns:p14="http://schemas.microsoft.com/office/powerpoint/2010/main" spd="slow" p14:dur="2000">
         <p159:morph option="byObject"/>
       </p:transition>
     </mc:Choice>
-    <mc:Fallback>
+    <mc:Fallback xmlns="">
       <p:transition spd="slow">
         <p:fade/>
       </p:transition>
@@ -31606,13 +33577,13 @@
   <p:clrMapOvr>
     <a:masterClrMapping/>
   </p:clrMapOvr>
-  <mc:AlternateContent xmlns:mc="http://schemas.openxmlformats.org/markup-compatibility/2006">
-    <mc:Choice xmlns:p159="http://schemas.microsoft.com/office/powerpoint/2015/09/main" Requires="p159">
+  <mc:AlternateContent xmlns:mc="http://schemas.openxmlformats.org/markup-compatibility/2006" xmlns:p159="http://schemas.microsoft.com/office/powerpoint/2015/09/main">
+    <mc:Choice Requires="p159">
       <p:transition xmlns:p14="http://schemas.microsoft.com/office/powerpoint/2010/main" spd="slow" p14:dur="2000">
         <p159:morph option="byObject"/>
       </p:transition>
     </mc:Choice>
-    <mc:Fallback>
+    <mc:Fallback xmlns="">
       <p:transition spd="slow">
         <p:fade/>
       </p:transition>
@@ -32085,13 +34056,13 @@
   <p:clrMapOvr>
     <a:masterClrMapping/>
   </p:clrMapOvr>
-  <mc:AlternateContent xmlns:mc="http://schemas.openxmlformats.org/markup-compatibility/2006">
-    <mc:Choice xmlns:p159="http://schemas.microsoft.com/office/powerpoint/2015/09/main" Requires="p159">
+  <mc:AlternateContent xmlns:mc="http://schemas.openxmlformats.org/markup-compatibility/2006" xmlns:p159="http://schemas.microsoft.com/office/powerpoint/2015/09/main">
+    <mc:Choice Requires="p159">
       <p:transition xmlns:p14="http://schemas.microsoft.com/office/powerpoint/2010/main" spd="slow" p14:dur="2000">
         <p159:morph option="byObject"/>
       </p:transition>
     </mc:Choice>
-    <mc:Fallback>
+    <mc:Fallback xmlns="">
       <p:transition spd="slow">
         <p:fade/>
       </p:transition>
@@ -32370,13 +34341,13 @@
   <p:clrMapOvr>
     <a:masterClrMapping/>
   </p:clrMapOvr>
-  <mc:AlternateContent xmlns:mc="http://schemas.openxmlformats.org/markup-compatibility/2006">
-    <mc:Choice xmlns:p159="http://schemas.microsoft.com/office/powerpoint/2015/09/main" Requires="p159">
+  <mc:AlternateContent xmlns:mc="http://schemas.openxmlformats.org/markup-compatibility/2006" xmlns:p159="http://schemas.microsoft.com/office/powerpoint/2015/09/main">
+    <mc:Choice Requires="p159">
       <p:transition xmlns:p14="http://schemas.microsoft.com/office/powerpoint/2010/main" spd="slow" p14:dur="2000">
         <p159:morph option="byObject"/>
       </p:transition>
     </mc:Choice>
-    <mc:Fallback>
+    <mc:Fallback xmlns="">
       <p:transition spd="slow">
         <p:fade/>
       </p:transition>
@@ -32708,13 +34679,13 @@
   <p:clrMapOvr>
     <a:masterClrMapping/>
   </p:clrMapOvr>
-  <mc:AlternateContent xmlns:mc="http://schemas.openxmlformats.org/markup-compatibility/2006">
-    <mc:Choice xmlns:p159="http://schemas.microsoft.com/office/powerpoint/2015/09/main" Requires="p159">
+  <mc:AlternateContent xmlns:mc="http://schemas.openxmlformats.org/markup-compatibility/2006" xmlns:p159="http://schemas.microsoft.com/office/powerpoint/2015/09/main">
+    <mc:Choice Requires="p159">
       <p:transition xmlns:p14="http://schemas.microsoft.com/office/powerpoint/2010/main" spd="slow" p14:dur="2000">
         <p159:morph option="byObject"/>
       </p:transition>
     </mc:Choice>
-    <mc:Fallback>
+    <mc:Fallback xmlns="">
       <p:transition spd="slow">
         <p:fade/>
       </p:transition>
@@ -32983,7 +34954,7 @@
             </a:pathLst>
           </a:custGeom>
           <a:blipFill>
-            <a:blip r:embed="rId2"/>
+            <a:blip r:embed="rId3"/>
             <a:stretch>
               <a:fillRect/>
             </a:stretch>
@@ -33046,13 +35017,13 @@
   <p:clrMapOvr>
     <a:masterClrMapping/>
   </p:clrMapOvr>
-  <mc:AlternateContent xmlns:mc="http://schemas.openxmlformats.org/markup-compatibility/2006">
-    <mc:Choice xmlns:p159="http://schemas.microsoft.com/office/powerpoint/2015/09/main" Requires="p159">
+  <mc:AlternateContent xmlns:mc="http://schemas.openxmlformats.org/markup-compatibility/2006" xmlns:p159="http://schemas.microsoft.com/office/powerpoint/2015/09/main">
+    <mc:Choice Requires="p159">
       <p:transition xmlns:p14="http://schemas.microsoft.com/office/powerpoint/2010/main" spd="slow" p14:dur="2000">
         <p159:morph option="byObject"/>
       </p:transition>
     </mc:Choice>
-    <mc:Fallback>
+    <mc:Fallback xmlns="">
       <p:transition spd="slow">
         <p:fade/>
       </p:transition>
